--- a/exports/pptx/lessons/middle-module-05-dot-addition/day-04-multiple-columns.pptx
+++ b/exports/pptx/lessons/middle-module-05-dot-addition/day-04-multiple-columns.pptx
@@ -17,9 +17,14 @@
     <p:sldId id="265" r:id="rId11"/>
     <p:sldId id="266" r:id="rId12"/>
     <p:sldId id="267" r:id="rId13"/>
+    <p:sldId id="268" r:id="rId14"/>
+    <p:sldId id="269" r:id="rId15"/>
+    <p:sldId id="270" r:id="rId16"/>
+    <p:sldId id="271" r:id="rId17"/>
+    <p:sldId id="272" r:id="rId18"/>
   </p:sldIdLst>
   <p:notesMasterIdLst>
-    <p:notesMasterId r:id="rId14"/>
+    <p:notesMasterId r:id="rId19"/>
   </p:notesMasterIdLst>
   <p:sldSz cx="9144000" cy="5143500"/>
   <p:notesSz cx="5143500" cy="9144000"/>
@@ -801,6 +806,446 @@
             <a:fld id="{F7021451-1387-4CA6-816F-3879F97B5CBC}" type="slidenum">
               <a:rPr lang="en-US"/>
               <a:t>12</a:t>
+            </a:fld>
+            <a:endParaRPr lang="en-US"/>
+          </a:p>
+        </p:txBody>
+      </p:sp>
+    </p:spTree>
+    <p:extLst>
+      <p:ext uri="{BB962C8B-B14F-4D97-AF65-F5344CB8AC3E}">
+        <p14:creationId xmlns:p14="http://schemas.microsoft.com/office/powerpoint/2010/main" val="1024086991"/>
+      </p:ext>
+    </p:extLst>
+  </p:cSld>
+  <p:clrMapOvr>
+    <a:masterClrMapping/>
+  </p:clrMapOvr>
+</p:notes>
+</file>
+
+<file path=ppt/notesSlides/notesSlide13.xml><?xml version="1.0" encoding="utf-8"?>
+<p:notes xmlns:a="http://schemas.openxmlformats.org/drawingml/2006/main" xmlns:r="http://schemas.openxmlformats.org/officeDocument/2006/relationships" xmlns:p="http://schemas.openxmlformats.org/presentationml/2006/main">
+  <p:cSld>
+    <p:spTree>
+      <p:nvGrpSpPr>
+        <p:cNvPr id="1" name=""/>
+        <p:cNvGrpSpPr/>
+        <p:nvPr/>
+      </p:nvGrpSpPr>
+      <p:grpSpPr>
+        <a:xfrm>
+          <a:off x="0" y="0"/>
+          <a:ext cx="0" cy="0"/>
+          <a:chOff x="0" y="0"/>
+          <a:chExt cx="0" cy="0"/>
+        </a:xfrm>
+      </p:grpSpPr>
+      <p:sp>
+        <p:nvSpPr>
+          <p:cNvPr id="2" name="Slide Image Placeholder 1"/>
+          <p:cNvSpPr>
+            <a:spLocks noGrp="1" noRot="1" noChangeAspect="1"/>
+          </p:cNvSpPr>
+          <p:nvPr>
+            <p:ph type="sldImg"/>
+          </p:nvPr>
+        </p:nvSpPr>
+        <p:spPr/>
+      </p:sp>
+      <p:sp>
+        <p:nvSpPr>
+          <p:cNvPr id="3" name="Notes Placeholder 2"/>
+          <p:cNvSpPr>
+            <a:spLocks noGrp="1"/>
+          </p:cNvSpPr>
+          <p:nvPr>
+            <p:ph type="body" idx="1"/>
+          </p:nvPr>
+        </p:nvSpPr>
+        <p:spPr/>
+        <p:txBody>
+          <a:bodyPr/>
+          <a:lstStyle/>
+          <a:p>
+            <a:r>
+              <a:rPr lang="en-US" dirty="0"/>
+              <a:t/>
+            </a:r>
+            <a:endParaRPr lang="en-US" dirty="0"/>
+          </a:p>
+        </p:txBody>
+      </p:sp>
+      <p:sp>
+        <p:nvSpPr>
+          <p:cNvPr id="4" name="Slide Number Placeholder 3"/>
+          <p:cNvSpPr>
+            <a:spLocks noGrp="1"/>
+          </p:cNvSpPr>
+          <p:nvPr>
+            <p:ph type="sldNum" sz="quarter" idx="10"/>
+          </p:nvPr>
+        </p:nvSpPr>
+        <p:spPr/>
+        <p:txBody>
+          <a:bodyPr/>
+          <a:lstStyle/>
+          <a:p>
+            <a:fld id="{F7021451-1387-4CA6-816F-3879F97B5CBC}" type="slidenum">
+              <a:rPr lang="en-US"/>
+              <a:t>13</a:t>
+            </a:fld>
+            <a:endParaRPr lang="en-US"/>
+          </a:p>
+        </p:txBody>
+      </p:sp>
+    </p:spTree>
+    <p:extLst>
+      <p:ext uri="{BB962C8B-B14F-4D97-AF65-F5344CB8AC3E}">
+        <p14:creationId xmlns:p14="http://schemas.microsoft.com/office/powerpoint/2010/main" val="1024086991"/>
+      </p:ext>
+    </p:extLst>
+  </p:cSld>
+  <p:clrMapOvr>
+    <a:masterClrMapping/>
+  </p:clrMapOvr>
+</p:notes>
+</file>
+
+<file path=ppt/notesSlides/notesSlide14.xml><?xml version="1.0" encoding="utf-8"?>
+<p:notes xmlns:a="http://schemas.openxmlformats.org/drawingml/2006/main" xmlns:r="http://schemas.openxmlformats.org/officeDocument/2006/relationships" xmlns:p="http://schemas.openxmlformats.org/presentationml/2006/main">
+  <p:cSld>
+    <p:spTree>
+      <p:nvGrpSpPr>
+        <p:cNvPr id="1" name=""/>
+        <p:cNvGrpSpPr/>
+        <p:nvPr/>
+      </p:nvGrpSpPr>
+      <p:grpSpPr>
+        <a:xfrm>
+          <a:off x="0" y="0"/>
+          <a:ext cx="0" cy="0"/>
+          <a:chOff x="0" y="0"/>
+          <a:chExt cx="0" cy="0"/>
+        </a:xfrm>
+      </p:grpSpPr>
+      <p:sp>
+        <p:nvSpPr>
+          <p:cNvPr id="2" name="Slide Image Placeholder 1"/>
+          <p:cNvSpPr>
+            <a:spLocks noGrp="1" noRot="1" noChangeAspect="1"/>
+          </p:cNvSpPr>
+          <p:nvPr>
+            <p:ph type="sldImg"/>
+          </p:nvPr>
+        </p:nvSpPr>
+        <p:spPr/>
+      </p:sp>
+      <p:sp>
+        <p:nvSpPr>
+          <p:cNvPr id="3" name="Notes Placeholder 2"/>
+          <p:cNvSpPr>
+            <a:spLocks noGrp="1"/>
+          </p:cNvSpPr>
+          <p:nvPr>
+            <p:ph type="body" idx="1"/>
+          </p:nvPr>
+        </p:nvSpPr>
+        <p:spPr/>
+        <p:txBody>
+          <a:bodyPr/>
+          <a:lstStyle/>
+          <a:p>
+            <a:r>
+              <a:rPr lang="en-US" dirty="0"/>
+              <a:t/>
+            </a:r>
+            <a:endParaRPr lang="en-US" dirty="0"/>
+          </a:p>
+        </p:txBody>
+      </p:sp>
+      <p:sp>
+        <p:nvSpPr>
+          <p:cNvPr id="4" name="Slide Number Placeholder 3"/>
+          <p:cNvSpPr>
+            <a:spLocks noGrp="1"/>
+          </p:cNvSpPr>
+          <p:nvPr>
+            <p:ph type="sldNum" sz="quarter" idx="10"/>
+          </p:nvPr>
+        </p:nvSpPr>
+        <p:spPr/>
+        <p:txBody>
+          <a:bodyPr/>
+          <a:lstStyle/>
+          <a:p>
+            <a:fld id="{F7021451-1387-4CA6-816F-3879F97B5CBC}" type="slidenum">
+              <a:rPr lang="en-US"/>
+              <a:t>14</a:t>
+            </a:fld>
+            <a:endParaRPr lang="en-US"/>
+          </a:p>
+        </p:txBody>
+      </p:sp>
+    </p:spTree>
+    <p:extLst>
+      <p:ext uri="{BB962C8B-B14F-4D97-AF65-F5344CB8AC3E}">
+        <p14:creationId xmlns:p14="http://schemas.microsoft.com/office/powerpoint/2010/main" val="1024086991"/>
+      </p:ext>
+    </p:extLst>
+  </p:cSld>
+  <p:clrMapOvr>
+    <a:masterClrMapping/>
+  </p:clrMapOvr>
+</p:notes>
+</file>
+
+<file path=ppt/notesSlides/notesSlide15.xml><?xml version="1.0" encoding="utf-8"?>
+<p:notes xmlns:a="http://schemas.openxmlformats.org/drawingml/2006/main" xmlns:r="http://schemas.openxmlformats.org/officeDocument/2006/relationships" xmlns:p="http://schemas.openxmlformats.org/presentationml/2006/main">
+  <p:cSld>
+    <p:spTree>
+      <p:nvGrpSpPr>
+        <p:cNvPr id="1" name=""/>
+        <p:cNvGrpSpPr/>
+        <p:nvPr/>
+      </p:nvGrpSpPr>
+      <p:grpSpPr>
+        <a:xfrm>
+          <a:off x="0" y="0"/>
+          <a:ext cx="0" cy="0"/>
+          <a:chOff x="0" y="0"/>
+          <a:chExt cx="0" cy="0"/>
+        </a:xfrm>
+      </p:grpSpPr>
+      <p:sp>
+        <p:nvSpPr>
+          <p:cNvPr id="2" name="Slide Image Placeholder 1"/>
+          <p:cNvSpPr>
+            <a:spLocks noGrp="1" noRot="1" noChangeAspect="1"/>
+          </p:cNvSpPr>
+          <p:nvPr>
+            <p:ph type="sldImg"/>
+          </p:nvPr>
+        </p:nvSpPr>
+        <p:spPr/>
+      </p:sp>
+      <p:sp>
+        <p:nvSpPr>
+          <p:cNvPr id="3" name="Notes Placeholder 2"/>
+          <p:cNvSpPr>
+            <a:spLocks noGrp="1"/>
+          </p:cNvSpPr>
+          <p:nvPr>
+            <p:ph type="body" idx="1"/>
+          </p:nvPr>
+        </p:nvSpPr>
+        <p:spPr/>
+        <p:txBody>
+          <a:bodyPr/>
+          <a:lstStyle/>
+          <a:p>
+            <a:r>
+              <a:rPr lang="en-US" dirty="0"/>
+              <a:t/>
+            </a:r>
+            <a:endParaRPr lang="en-US" dirty="0"/>
+          </a:p>
+        </p:txBody>
+      </p:sp>
+      <p:sp>
+        <p:nvSpPr>
+          <p:cNvPr id="4" name="Slide Number Placeholder 3"/>
+          <p:cNvSpPr>
+            <a:spLocks noGrp="1"/>
+          </p:cNvSpPr>
+          <p:nvPr>
+            <p:ph type="sldNum" sz="quarter" idx="10"/>
+          </p:nvPr>
+        </p:nvSpPr>
+        <p:spPr/>
+        <p:txBody>
+          <a:bodyPr/>
+          <a:lstStyle/>
+          <a:p>
+            <a:fld id="{F7021451-1387-4CA6-816F-3879F97B5CBC}" type="slidenum">
+              <a:rPr lang="en-US"/>
+              <a:t>15</a:t>
+            </a:fld>
+            <a:endParaRPr lang="en-US"/>
+          </a:p>
+        </p:txBody>
+      </p:sp>
+    </p:spTree>
+    <p:extLst>
+      <p:ext uri="{BB962C8B-B14F-4D97-AF65-F5344CB8AC3E}">
+        <p14:creationId xmlns:p14="http://schemas.microsoft.com/office/powerpoint/2010/main" val="1024086991"/>
+      </p:ext>
+    </p:extLst>
+  </p:cSld>
+  <p:clrMapOvr>
+    <a:masterClrMapping/>
+  </p:clrMapOvr>
+</p:notes>
+</file>
+
+<file path=ppt/notesSlides/notesSlide16.xml><?xml version="1.0" encoding="utf-8"?>
+<p:notes xmlns:a="http://schemas.openxmlformats.org/drawingml/2006/main" xmlns:r="http://schemas.openxmlformats.org/officeDocument/2006/relationships" xmlns:p="http://schemas.openxmlformats.org/presentationml/2006/main">
+  <p:cSld>
+    <p:spTree>
+      <p:nvGrpSpPr>
+        <p:cNvPr id="1" name=""/>
+        <p:cNvGrpSpPr/>
+        <p:nvPr/>
+      </p:nvGrpSpPr>
+      <p:grpSpPr>
+        <a:xfrm>
+          <a:off x="0" y="0"/>
+          <a:ext cx="0" cy="0"/>
+          <a:chOff x="0" y="0"/>
+          <a:chExt cx="0" cy="0"/>
+        </a:xfrm>
+      </p:grpSpPr>
+      <p:sp>
+        <p:nvSpPr>
+          <p:cNvPr id="2" name="Slide Image Placeholder 1"/>
+          <p:cNvSpPr>
+            <a:spLocks noGrp="1" noRot="1" noChangeAspect="1"/>
+          </p:cNvSpPr>
+          <p:nvPr>
+            <p:ph type="sldImg"/>
+          </p:nvPr>
+        </p:nvSpPr>
+        <p:spPr/>
+      </p:sp>
+      <p:sp>
+        <p:nvSpPr>
+          <p:cNvPr id="3" name="Notes Placeholder 2"/>
+          <p:cNvSpPr>
+            <a:spLocks noGrp="1"/>
+          </p:cNvSpPr>
+          <p:nvPr>
+            <p:ph type="body" idx="1"/>
+          </p:nvPr>
+        </p:nvSpPr>
+        <p:spPr/>
+        <p:txBody>
+          <a:bodyPr/>
+          <a:lstStyle/>
+          <a:p>
+            <a:r>
+              <a:rPr lang="en-US" dirty="0"/>
+              <a:t/>
+            </a:r>
+            <a:endParaRPr lang="en-US" dirty="0"/>
+          </a:p>
+        </p:txBody>
+      </p:sp>
+      <p:sp>
+        <p:nvSpPr>
+          <p:cNvPr id="4" name="Slide Number Placeholder 3"/>
+          <p:cNvSpPr>
+            <a:spLocks noGrp="1"/>
+          </p:cNvSpPr>
+          <p:nvPr>
+            <p:ph type="sldNum" sz="quarter" idx="10"/>
+          </p:nvPr>
+        </p:nvSpPr>
+        <p:spPr/>
+        <p:txBody>
+          <a:bodyPr/>
+          <a:lstStyle/>
+          <a:p>
+            <a:fld id="{F7021451-1387-4CA6-816F-3879F97B5CBC}" type="slidenum">
+              <a:rPr lang="en-US"/>
+              <a:t>16</a:t>
+            </a:fld>
+            <a:endParaRPr lang="en-US"/>
+          </a:p>
+        </p:txBody>
+      </p:sp>
+    </p:spTree>
+    <p:extLst>
+      <p:ext uri="{BB962C8B-B14F-4D97-AF65-F5344CB8AC3E}">
+        <p14:creationId xmlns:p14="http://schemas.microsoft.com/office/powerpoint/2010/main" val="1024086991"/>
+      </p:ext>
+    </p:extLst>
+  </p:cSld>
+  <p:clrMapOvr>
+    <a:masterClrMapping/>
+  </p:clrMapOvr>
+</p:notes>
+</file>
+
+<file path=ppt/notesSlides/notesSlide17.xml><?xml version="1.0" encoding="utf-8"?>
+<p:notes xmlns:a="http://schemas.openxmlformats.org/drawingml/2006/main" xmlns:r="http://schemas.openxmlformats.org/officeDocument/2006/relationships" xmlns:p="http://schemas.openxmlformats.org/presentationml/2006/main">
+  <p:cSld>
+    <p:spTree>
+      <p:nvGrpSpPr>
+        <p:cNvPr id="1" name=""/>
+        <p:cNvGrpSpPr/>
+        <p:nvPr/>
+      </p:nvGrpSpPr>
+      <p:grpSpPr>
+        <a:xfrm>
+          <a:off x="0" y="0"/>
+          <a:ext cx="0" cy="0"/>
+          <a:chOff x="0" y="0"/>
+          <a:chExt cx="0" cy="0"/>
+        </a:xfrm>
+      </p:grpSpPr>
+      <p:sp>
+        <p:nvSpPr>
+          <p:cNvPr id="2" name="Slide Image Placeholder 1"/>
+          <p:cNvSpPr>
+            <a:spLocks noGrp="1" noRot="1" noChangeAspect="1"/>
+          </p:cNvSpPr>
+          <p:nvPr>
+            <p:ph type="sldImg"/>
+          </p:nvPr>
+        </p:nvSpPr>
+        <p:spPr/>
+      </p:sp>
+      <p:sp>
+        <p:nvSpPr>
+          <p:cNvPr id="3" name="Notes Placeholder 2"/>
+          <p:cNvSpPr>
+            <a:spLocks noGrp="1"/>
+          </p:cNvSpPr>
+          <p:nvPr>
+            <p:ph type="body" idx="1"/>
+          </p:nvPr>
+        </p:nvSpPr>
+        <p:spPr/>
+        <p:txBody>
+          <a:bodyPr/>
+          <a:lstStyle/>
+          <a:p>
+            <a:r>
+              <a:rPr lang="en-US" dirty="0"/>
+              <a:t/>
+            </a:r>
+            <a:endParaRPr lang="en-US" dirty="0"/>
+          </a:p>
+        </p:txBody>
+      </p:sp>
+      <p:sp>
+        <p:nvSpPr>
+          <p:cNvPr id="4" name="Slide Number Placeholder 3"/>
+          <p:cNvSpPr>
+            <a:spLocks noGrp="1"/>
+          </p:cNvSpPr>
+          <p:nvPr>
+            <p:ph type="sldNum" sz="quarter" idx="10"/>
+          </p:nvPr>
+        </p:nvSpPr>
+        <p:spPr/>
+        <p:txBody>
+          <a:bodyPr/>
+          <a:lstStyle/>
+          <a:p>
+            <a:fld id="{F7021451-1387-4CA6-816F-3879F97B5CBC}" type="slidenum">
+              <a:rPr lang="en-US"/>
+              <a:t>17</a:t>
             </a:fld>
             <a:endParaRPr lang="en-US"/>
           </a:p>
@@ -2100,102 +2545,6 @@
         </p:nvSpPr>
         <p:spPr>
           <a:xfrm>
-            <a:off x="406301" y="1223963"/>
-            <a:ext cx="8498026" cy="274290"/>
-          </a:xfrm>
-          <a:prstGeom prst="rect">
-            <a:avLst/>
-          </a:prstGeom>
-          <a:noFill/>
-          <a:ln/>
-        </p:spPr>
-        <p:txBody>
-          <a:bodyPr wrap="square" lIns="0" tIns="0" rIns="0" bIns="0" rtlCol="0" anchor="t"/>
-          <a:lstStyle/>
-          <a:p>
-            <a:pPr algn="l" indent="0" marL="0">
-              <a:lnSpc>
-                <a:spcPts val="2160"/>
-              </a:lnSpc>
-              <a:spcBef>
-                <a:spcPts val="600"/>
-              </a:spcBef>
-              <a:spcAft>
-                <a:spcPts val="800"/>
-              </a:spcAft>
-              <a:buNone/>
-            </a:pPr>
-            <a:r>
-              <a:rPr lang="en-US" sz="1800" b="1" dirty="0">
-                <a:solidFill>
-                  <a:srgbClr val="FE4447"/>
-                </a:solidFill>
-                <a:latin typeface="Georgia" pitchFamily="34" charset="0"/>
-                <a:ea typeface="Georgia" pitchFamily="34" charset="-122"/>
-                <a:cs typeface="Georgia" pitchFamily="34" charset="-120"/>
-              </a:rPr>
-              <a:t>Learning objective</a:t>
-            </a:r>
-            <a:endParaRPr lang="en-US" sz="1800" dirty="0"/>
-          </a:p>
-        </p:txBody>
-      </p:sp>
-      <p:sp>
-        <p:nvSpPr>
-          <p:cNvPr id="6" name="Text 4"/>
-          <p:cNvSpPr/>
-          <p:nvPr/>
-        </p:nvSpPr>
-        <p:spPr>
-          <a:xfrm>
-            <a:off x="406301" y="1637854"/>
-            <a:ext cx="8498026" cy="426541"/>
-          </a:xfrm>
-          <a:prstGeom prst="rect">
-            <a:avLst/>
-          </a:prstGeom>
-          <a:noFill/>
-          <a:ln/>
-        </p:spPr>
-        <p:txBody>
-          <a:bodyPr wrap="square" lIns="0" tIns="0" rIns="0" bIns="0" rtlCol="0" anchor="t"/>
-          <a:lstStyle/>
-          <a:p>
-            <a:pPr algn="l" indent="0" marL="0">
-              <a:lnSpc>
-                <a:spcPts val="1680"/>
-              </a:lnSpc>
-              <a:spcBef>
-                <a:spcPts val="300"/>
-              </a:spcBef>
-              <a:spcAft>
-                <a:spcPts val="300"/>
-              </a:spcAft>
-              <a:buNone/>
-            </a:pPr>
-            <a:r>
-              <a:rPr lang="en-US" sz="1200" dirty="0">
-                <a:solidFill>
-                  <a:srgbClr val="1C2833"/>
-                </a:solidFill>
-                <a:latin typeface="Arial" pitchFamily="34" charset="0"/>
-                <a:ea typeface="Arial" pitchFamily="34" charset="-122"/>
-                <a:cs typeface="Arial" pitchFamily="34" charset="-120"/>
-              </a:rPr>
-              <a:t>By the end of this lesson, students will add a 4-addend × 4-digit column-sum using the dot method, correctly propagating carries between columns.</a:t>
-            </a:r>
-            <a:endParaRPr lang="en-US" sz="1200" dirty="0"/>
-          </a:p>
-        </p:txBody>
-      </p:sp>
-      <p:sp>
-        <p:nvSpPr>
-          <p:cNvPr id="7" name="Text 5"/>
-          <p:cNvSpPr/>
-          <p:nvPr/>
-        </p:nvSpPr>
-        <p:spPr>
-          <a:xfrm>
             <a:off x="406301" y="4434929"/>
             <a:ext cx="8498026" cy="213271"/>
           </a:xfrm>
@@ -2340,7 +2689,7 @@
                 <a:ea typeface="Georgia" pitchFamily="34" charset="-122"/>
                 <a:cs typeface="Georgia" pitchFamily="34" charset="-120"/>
               </a:rPr>
-              <a:t>Differentiation</a:t>
+              <a:t>Core (10 min) — The carry handoff (cont.)</a:t>
             </a:r>
             <a:endParaRPr lang="en-US" sz="1800" dirty="0"/>
           </a:p>
@@ -2354,8 +2703,8 @@
         </p:nvSpPr>
         <p:spPr>
           <a:xfrm>
-            <a:off x="634901" y="883593"/>
-            <a:ext cx="8102798" cy="525661"/>
+            <a:off x="406301" y="870942"/>
+            <a:ext cx="8498026" cy="213271"/>
           </a:xfrm>
           <a:prstGeom prst="rect">
             <a:avLst/>
@@ -2367,18 +2716,20 @@
           <a:bodyPr wrap="square" lIns="0" tIns="0" rIns="0" bIns="0" rtlCol="0" anchor="t"/>
           <a:lstStyle/>
           <a:p>
-            <a:pPr algn="l" marL="342900" indent="-342900">
-              <a:lnSpc>
-                <a:spcPts val="1620"/>
-              </a:lnSpc>
-              <a:spcAft>
-                <a:spcPts val="300"/>
-              </a:spcAft>
-              <a:buSzPct val="100000"/>
-              <a:buChar char="•"/>
-            </a:pPr>
-            <a:r>
-              <a:rPr lang="en-US" sz="1200" b="1" dirty="0">
+            <a:pPr algn="l" indent="0" marL="0">
+              <a:lnSpc>
+                <a:spcPts val="1680"/>
+              </a:lnSpc>
+              <a:spcBef>
+                <a:spcPts val="300"/>
+              </a:spcBef>
+              <a:spcAft>
+                <a:spcPts val="300"/>
+              </a:spcAft>
+              <a:buNone/>
+            </a:pPr>
+            <a:r>
+              <a:rPr lang="en-US" sz="1200" dirty="0">
                 <a:solidFill>
                   <a:srgbClr val="1C2833"/>
                 </a:solidFill>
@@ -2386,19 +2737,22 @@
                 <a:ea typeface="Arial" pitchFamily="34" charset="-122"/>
                 <a:cs typeface="Arial" pitchFamily="34" charset="-120"/>
               </a:rPr>
-              <a:t>Tier up:</a:t>
+              <a:t>Final result: </a:t>
             </a:r>
             <a:pPr algn="l" indent="0" marL="0">
               <a:lnSpc>
-                <a:spcPts val="1620"/>
-              </a:lnSpc>
-              <a:spcAft>
-                <a:spcPts val="300"/>
-              </a:spcAft>
-              <a:buNone/>
-            </a:pPr>
-            <a:r>
-              <a:rPr lang="en-US" sz="1200" dirty="0">
+                <a:spcPts val="1680"/>
+              </a:lnSpc>
+              <a:spcBef>
+                <a:spcPts val="300"/>
+              </a:spcBef>
+              <a:spcAft>
+                <a:spcPts val="300"/>
+              </a:spcAft>
+              <a:buNone/>
+            </a:pPr>
+            <a:r>
+              <a:rPr lang="en-US" sz="1200" b="1" dirty="0">
                 <a:solidFill>
                   <a:srgbClr val="1C2833"/>
                 </a:solidFill>
@@ -2406,10 +2760,32 @@
                 <a:ea typeface="Arial" pitchFamily="34" charset="-122"/>
                 <a:cs typeface="Arial" pitchFamily="34" charset="-120"/>
               </a:rPr>
-              <a:t> 5×5-digit sums; aim for under 90 seconds.</a:t>
+              <a:t>20573</a:t>
             </a:r>
             <a:endParaRPr lang="en-US" sz="1200" dirty="0"/>
           </a:p>
+        </p:txBody>
+      </p:sp>
+      <p:sp>
+        <p:nvSpPr>
+          <p:cNvPr id="5" name="Text 3"/>
+          <p:cNvSpPr/>
+          <p:nvPr/>
+        </p:nvSpPr>
+        <p:spPr>
+          <a:xfrm>
+            <a:off x="634901" y="1173063"/>
+            <a:ext cx="8102798" cy="281880"/>
+          </a:xfrm>
+          <a:prstGeom prst="rect">
+            <a:avLst/>
+          </a:prstGeom>
+          <a:noFill/>
+          <a:ln/>
+        </p:spPr>
+        <p:txBody>
+          <a:bodyPr wrap="square" lIns="0" tIns="0" rIns="0" bIns="0" rtlCol="0" anchor="t"/>
+          <a:lstStyle/>
           <a:p>
             <a:pPr algn="l" marL="342900" indent="-342900">
               <a:lnSpc>
@@ -2422,7 +2798,7 @@
               <a:buChar char="•"/>
             </a:pPr>
             <a:r>
-              <a:rPr lang="en-US" sz="1200" b="1" dirty="0">
+              <a:rPr lang="en-US" sz="1200" dirty="0">
                 <a:solidFill>
                   <a:srgbClr val="1C2833"/>
                 </a:solidFill>
@@ -2430,27 +2806,7 @@
                 <a:ea typeface="Arial" pitchFamily="34" charset="-122"/>
                 <a:cs typeface="Arial" pitchFamily="34" charset="-120"/>
               </a:rPr>
-              <a:t>Tier down:</a:t>
-            </a:r>
-            <a:pPr algn="l" indent="0" marL="0">
-              <a:lnSpc>
-                <a:spcPts val="1620"/>
-              </a:lnSpc>
-              <a:spcAft>
-                <a:spcPts val="300"/>
-              </a:spcAft>
-              <a:buNone/>
-            </a:pPr>
-            <a:r>
-              <a:rPr lang="en-US" sz="1200" dirty="0">
-                <a:solidFill>
-                  <a:srgbClr val="1C2833"/>
-                </a:solidFill>
-                <a:latin typeface="Arial" pitchFamily="34" charset="0"/>
-                <a:ea typeface="Arial" pitchFamily="34" charset="-122"/>
-                <a:cs typeface="Arial" pitchFamily="34" charset="-120"/>
-              </a:rPr>
-              <a:t> 3×3-digit sums until comfortable; scale up.</a:t>
+              <a:t>Verify with calculator or standard algorithm.</a:t>
             </a:r>
             <a:endParaRPr lang="en-US" sz="1200" dirty="0"/>
           </a:p>
@@ -2458,7 +2814,7 @@
       </p:sp>
       <p:sp>
         <p:nvSpPr>
-          <p:cNvPr id="5" name="Text 3"/>
+          <p:cNvPr id="6" name="Text 4"/>
           <p:cNvSpPr/>
           <p:nvPr/>
         </p:nvSpPr>
@@ -2608,7 +2964,7 @@
                 <a:ea typeface="Georgia" pitchFamily="34" charset="-122"/>
                 <a:cs typeface="Georgia" pitchFamily="34" charset="-120"/>
               </a:rPr>
-              <a:t>Teacher notes</a:t>
+              <a:t>Activity (25 min) — Drill</a:t>
             </a:r>
             <a:endParaRPr lang="en-US" sz="1800" dirty="0"/>
           </a:p>
@@ -2623,7 +2979,7 @@
         <p:spPr>
           <a:xfrm>
             <a:off x="406301" y="870942"/>
-            <a:ext cx="8498026" cy="639812"/>
+            <a:ext cx="8498026" cy="222796"/>
           </a:xfrm>
           <a:prstGeom prst="rect">
             <a:avLst/>
@@ -2656,7 +3012,53 @@
                 <a:ea typeface="Arial" pitchFamily="34" charset="-122"/>
                 <a:cs typeface="Arial" pitchFamily="34" charset="-120"/>
               </a:rPr>
-              <a:t>– The carry handoff is where most errors happen. Two common patterns:   1. Forgetting to include the carry in the next column.   2. Including it twice (once as the carry, once as part of the running total). – For each, slow down with the student and have them write the carry IN the column as a small digit before they start scanning.</a:t>
+              <a:t>Follow </a:t>
+            </a:r>
+            <a:pPr algn="l" indent="0" marL="0">
+              <a:lnSpc>
+                <a:spcPts val="1680"/>
+              </a:lnSpc>
+              <a:spcBef>
+                <a:spcPts val="300"/>
+              </a:spcBef>
+              <a:spcAft>
+                <a:spcPts val="300"/>
+              </a:spcAft>
+              <a:buNone/>
+            </a:pPr>
+            <a:r>
+              <a:rPr lang="en-US" sz="1200" dirty="0">
+                <a:solidFill>
+                  <a:srgbClr val="1C2833"/>
+                </a:solidFill>
+                <a:latin typeface="Arial" pitchFamily="34" charset="0"/>
+                <a:ea typeface="Arial" pitchFamily="34" charset="-122"/>
+                <a:cs typeface="Arial" pitchFamily="34" charset="-120"/>
+              </a:rPr>
+              <a:t>activities/activity-01-column-drill.md</a:t>
+            </a:r>
+            <a:pPr algn="l" indent="0" marL="0">
+              <a:lnSpc>
+                <a:spcPts val="1680"/>
+              </a:lnSpc>
+              <a:spcBef>
+                <a:spcPts val="300"/>
+              </a:spcBef>
+              <a:spcAft>
+                <a:spcPts val="300"/>
+              </a:spcAft>
+              <a:buNone/>
+            </a:pPr>
+            <a:r>
+              <a:rPr lang="en-US" sz="1200" dirty="0">
+                <a:solidFill>
+                  <a:srgbClr val="1C2833"/>
+                </a:solidFill>
+                <a:latin typeface="Arial" pitchFamily="34" charset="0"/>
+                <a:ea typeface="Arial" pitchFamily="34" charset="-122"/>
+                <a:cs typeface="Arial" pitchFamily="34" charset="-120"/>
+              </a:rPr>
+              <a:t>. Brief:</a:t>
             </a:r>
             <a:endParaRPr lang="en-US" sz="1200" dirty="0"/>
           </a:p>
@@ -2665,6 +3067,100 @@
       <p:sp>
         <p:nvSpPr>
           <p:cNvPr id="5" name="Text 3"/>
+          <p:cNvSpPr/>
+          <p:nvPr/>
+        </p:nvSpPr>
+        <p:spPr>
+          <a:xfrm>
+            <a:off x="634901" y="1182588"/>
+            <a:ext cx="8102798" cy="975122"/>
+          </a:xfrm>
+          <a:prstGeom prst="rect">
+            <a:avLst/>
+          </a:prstGeom>
+          <a:noFill/>
+          <a:ln/>
+        </p:spPr>
+        <p:txBody>
+          <a:bodyPr wrap="square" lIns="0" tIns="0" rIns="0" bIns="0" rtlCol="0" anchor="t"/>
+          <a:lstStyle/>
+          <a:p>
+            <a:pPr algn="l" marL="342900" indent="-342900">
+              <a:lnSpc>
+                <a:spcPts val="1620"/>
+              </a:lnSpc>
+              <a:spcAft>
+                <a:spcPts val="300"/>
+              </a:spcAft>
+              <a:buSzPct val="100000"/>
+              <a:buChar char="•"/>
+            </a:pPr>
+            <a:r>
+              <a:rPr lang="en-US" sz="1200" dirty="0">
+                <a:solidFill>
+                  <a:srgbClr val="1C2833"/>
+                </a:solidFill>
+                <a:latin typeface="Arial" pitchFamily="34" charset="0"/>
+                <a:ea typeface="Arial" pitchFamily="34" charset="-122"/>
+                <a:cs typeface="Arial" pitchFamily="34" charset="-120"/>
+              </a:rPr>
+              <a:t>8 multi-column problems, individual work first (8 min).</a:t>
+            </a:r>
+            <a:endParaRPr lang="en-US" sz="1200" dirty="0"/>
+          </a:p>
+          <a:p>
+            <a:pPr algn="l" marL="342900" indent="-342900">
+              <a:lnSpc>
+                <a:spcPts val="1620"/>
+              </a:lnSpc>
+              <a:spcAft>
+                <a:spcPts val="300"/>
+              </a:spcAft>
+              <a:buSzPct val="100000"/>
+              <a:buChar char="•"/>
+            </a:pPr>
+            <a:r>
+              <a:rPr lang="en-US" sz="1200" dirty="0">
+                <a:solidFill>
+                  <a:srgbClr val="1C2833"/>
+                </a:solidFill>
+                <a:latin typeface="Arial" pitchFamily="34" charset="0"/>
+                <a:ea typeface="Arial" pitchFamily="34" charset="-122"/>
+                <a:cs typeface="Arial" pitchFamily="34" charset="-120"/>
+              </a:rPr>
+              <a:t>Then paired check (10 min): partners trade sheets; one reads problem aloud while the other re-solves on a fresh sheet; compare results.</a:t>
+            </a:r>
+            <a:endParaRPr lang="en-US" sz="1200" dirty="0"/>
+          </a:p>
+          <a:p>
+            <a:pPr algn="l" marL="342900" indent="-342900">
+              <a:lnSpc>
+                <a:spcPts val="1620"/>
+              </a:lnSpc>
+              <a:spcAft>
+                <a:spcPts val="300"/>
+              </a:spcAft>
+              <a:buSzPct val="100000"/>
+              <a:buChar char="•"/>
+            </a:pPr>
+            <a:r>
+              <a:rPr lang="en-US" sz="1200" dirty="0">
+                <a:solidFill>
+                  <a:srgbClr val="1C2833"/>
+                </a:solidFill>
+                <a:latin typeface="Arial" pitchFamily="34" charset="0"/>
+                <a:ea typeface="Arial" pitchFamily="34" charset="-122"/>
+                <a:cs typeface="Arial" pitchFamily="34" charset="-120"/>
+              </a:rPr>
+              <a:t>Final 7 min: any 3 problems the student got wrong, redo silently.</a:t>
+            </a:r>
+            <a:endParaRPr lang="en-US" sz="1200" dirty="0"/>
+          </a:p>
+        </p:txBody>
+      </p:sp>
+      <p:sp>
+        <p:nvSpPr>
+          <p:cNvPr id="6" name="Text 4"/>
           <p:cNvSpPr/>
           <p:nvPr/>
         </p:nvSpPr>
@@ -2814,6 +3310,1454 @@
                 <a:ea typeface="Georgia" pitchFamily="34" charset="-122"/>
                 <a:cs typeface="Georgia" pitchFamily="34" charset="-120"/>
               </a:rPr>
+              <a:t>Wrap-up (5 min)</a:t>
+            </a:r>
+            <a:endParaRPr lang="en-US" sz="1800" dirty="0"/>
+          </a:p>
+        </p:txBody>
+      </p:sp>
+      <p:sp>
+        <p:nvSpPr>
+          <p:cNvPr id="4" name="Text 2"/>
+          <p:cNvSpPr/>
+          <p:nvPr/>
+        </p:nvSpPr>
+        <p:spPr>
+          <a:xfrm>
+            <a:off x="634901" y="883593"/>
+            <a:ext cx="8102798" cy="731341"/>
+          </a:xfrm>
+          <a:prstGeom prst="rect">
+            <a:avLst/>
+          </a:prstGeom>
+          <a:noFill/>
+          <a:ln/>
+        </p:spPr>
+        <p:txBody>
+          <a:bodyPr wrap="square" lIns="0" tIns="0" rIns="0" bIns="0" rtlCol="0" anchor="t"/>
+          <a:lstStyle/>
+          <a:p>
+            <a:pPr algn="l" marL="342900" indent="-342900">
+              <a:lnSpc>
+                <a:spcPts val="1620"/>
+              </a:lnSpc>
+              <a:spcAft>
+                <a:spcPts val="300"/>
+              </a:spcAft>
+              <a:buSzPct val="100000"/>
+              <a:buChar char="•"/>
+            </a:pPr>
+            <a:r>
+              <a:rPr lang="en-US" sz="1200" dirty="0">
+                <a:solidFill>
+                  <a:srgbClr val="1C2833"/>
+                </a:solidFill>
+                <a:latin typeface="Arial" pitchFamily="34" charset="0"/>
+                <a:ea typeface="Arial" pitchFamily="34" charset="-122"/>
+                <a:cs typeface="Arial" pitchFamily="34" charset="-120"/>
+              </a:rPr>
+              <a:t>Show of hands: who finished all 8 in 8 minutes? Who needs more time? (Don't shame either group — Day 5 is the retest.)</a:t>
+            </a:r>
+            <a:endParaRPr lang="en-US" sz="1200" dirty="0"/>
+          </a:p>
+          <a:p>
+            <a:pPr algn="l" marL="342900" indent="-342900">
+              <a:lnSpc>
+                <a:spcPts val="1620"/>
+              </a:lnSpc>
+              <a:spcAft>
+                <a:spcPts val="300"/>
+              </a:spcAft>
+              <a:buSzPct val="100000"/>
+              <a:buChar char="•"/>
+            </a:pPr>
+            <a:r>
+              <a:rPr lang="en-US" sz="1200" dirty="0">
+                <a:solidFill>
+                  <a:srgbClr val="1C2833"/>
+                </a:solidFill>
+                <a:latin typeface="Arial" pitchFamily="34" charset="0"/>
+                <a:ea typeface="Arial" pitchFamily="34" charset="-122"/>
+                <a:cs typeface="Arial" pitchFamily="34" charset="-120"/>
+              </a:rPr>
+              <a:t>Preview Day 5: timed re-test of Day 1's baseline problem.</a:t>
+            </a:r>
+            <a:endParaRPr lang="en-US" sz="1200" dirty="0"/>
+          </a:p>
+        </p:txBody>
+      </p:sp>
+      <p:sp>
+        <p:nvSpPr>
+          <p:cNvPr id="5" name="Text 3"/>
+          <p:cNvSpPr/>
+          <p:nvPr/>
+        </p:nvSpPr>
+        <p:spPr>
+          <a:xfrm>
+            <a:off x="406301" y="4434929"/>
+            <a:ext cx="8498026" cy="213271"/>
+          </a:xfrm>
+          <a:prstGeom prst="rect">
+            <a:avLst/>
+          </a:prstGeom>
+          <a:noFill/>
+          <a:ln/>
+        </p:spPr>
+        <p:txBody>
+          <a:bodyPr wrap="square" lIns="0" tIns="0" rIns="0" bIns="0" rtlCol="0" anchor="t"/>
+          <a:lstStyle/>
+          <a:p>
+            <a:pPr algn="l" indent="0" marL="0">
+              <a:lnSpc>
+                <a:spcPts val="1680"/>
+              </a:lnSpc>
+              <a:spcBef>
+                <a:spcPts val="300"/>
+              </a:spcBef>
+              <a:spcAft>
+                <a:spcPts val="300"/>
+              </a:spcAft>
+              <a:buNone/>
+            </a:pPr>
+            <a:r>
+              <a:rPr lang="en-US" sz="1200" dirty="0">
+                <a:solidFill>
+                  <a:srgbClr val="1C2833"/>
+                </a:solidFill>
+                <a:latin typeface="Arial" pitchFamily="34" charset="0"/>
+                <a:ea typeface="Arial" pitchFamily="34" charset="-122"/>
+                <a:cs typeface="Arial" pitchFamily="34" charset="-120"/>
+              </a:rPr>
+              <a:t>Middle ·  · IKS Curriculum</a:t>
+            </a:r>
+            <a:endParaRPr lang="en-US" sz="1200" dirty="0"/>
+          </a:p>
+        </p:txBody>
+      </p:sp>
+    </p:spTree>
+  </p:cSld>
+  <p:clrMapOvr>
+    <a:masterClrMapping/>
+  </p:clrMapOvr>
+</p:sld>
+</file>
+
+<file path=ppt/slides/slide13.xml><?xml version="1.0" encoding="utf-8"?>
+<p:sld xmlns:a="http://schemas.openxmlformats.org/drawingml/2006/main" xmlns:r="http://schemas.openxmlformats.org/officeDocument/2006/relationships" xmlns:p="http://schemas.openxmlformats.org/presentationml/2006/main">
+  <p:cSld name="Slide 13">
+    <p:bg>
+      <p:bgPr>
+        <a:solidFill>
+          <a:srgbClr val="FFFFFF"/>
+        </a:solidFill>
+      </p:bgPr>
+    </p:bg>
+    <p:spTree>
+      <p:nvGrpSpPr>
+        <p:cNvPr id="1" name=""/>
+        <p:cNvGrpSpPr/>
+        <p:nvPr/>
+      </p:nvGrpSpPr>
+      <p:grpSpPr>
+        <a:xfrm>
+          <a:off x="0" y="0"/>
+          <a:ext cx="0" cy="0"/>
+          <a:chOff x="0" y="0"/>
+          <a:chExt cx="0" cy="0"/>
+        </a:xfrm>
+      </p:grpSpPr>
+      <p:sp>
+        <p:nvSpPr>
+          <p:cNvPr id="2" name="Text 0"/>
+          <p:cNvSpPr/>
+          <p:nvPr/>
+        </p:nvSpPr>
+        <p:spPr>
+          <a:xfrm>
+            <a:off x="0" y="0"/>
+            <a:ext cx="9144000" cy="101501"/>
+          </a:xfrm>
+          <a:prstGeom prst="rect">
+            <a:avLst/>
+          </a:prstGeom>
+          <a:solidFill>
+            <a:srgbClr val="277884"/>
+          </a:solidFill>
+          <a:ln/>
+        </p:spPr>
+        <p:txBody>
+          <a:bodyPr wrap="square" rtlCol="0" anchor="ctr"/>
+          <a:lstStyle/>
+          <a:p>
+            <a:pPr indent="0" marL="0">
+              <a:buNone/>
+            </a:pPr>
+            <a:endParaRPr lang="en-US" dirty="0"/>
+          </a:p>
+        </p:txBody>
+      </p:sp>
+      <p:sp>
+        <p:nvSpPr>
+          <p:cNvPr id="3" name="Text 1"/>
+          <p:cNvSpPr/>
+          <p:nvPr/>
+        </p:nvSpPr>
+        <p:spPr>
+          <a:xfrm>
+            <a:off x="406301" y="457051"/>
+            <a:ext cx="8498026" cy="274290"/>
+          </a:xfrm>
+          <a:prstGeom prst="rect">
+            <a:avLst/>
+          </a:prstGeom>
+          <a:noFill/>
+          <a:ln/>
+        </p:spPr>
+        <p:txBody>
+          <a:bodyPr wrap="square" lIns="0" tIns="0" rIns="0" bIns="0" rtlCol="0" anchor="t"/>
+          <a:lstStyle/>
+          <a:p>
+            <a:pPr algn="l" indent="0" marL="0">
+              <a:lnSpc>
+                <a:spcPts val="2160"/>
+              </a:lnSpc>
+              <a:spcBef>
+                <a:spcPts val="600"/>
+              </a:spcBef>
+              <a:spcAft>
+                <a:spcPts val="800"/>
+              </a:spcAft>
+              <a:buNone/>
+            </a:pPr>
+            <a:r>
+              <a:rPr lang="en-US" sz="1800" b="1" dirty="0">
+                <a:solidFill>
+                  <a:srgbClr val="FE4447"/>
+                </a:solidFill>
+                <a:latin typeface="Georgia" pitchFamily="34" charset="0"/>
+                <a:ea typeface="Georgia" pitchFamily="34" charset="-122"/>
+                <a:cs typeface="Georgia" pitchFamily="34" charset="-120"/>
+              </a:rPr>
+              <a:t>Student-facing content</a:t>
+            </a:r>
+            <a:endParaRPr lang="en-US" sz="1800" dirty="0"/>
+          </a:p>
+        </p:txBody>
+      </p:sp>
+      <p:sp>
+        <p:nvSpPr>
+          <p:cNvPr id="4" name="Text 2"/>
+          <p:cNvSpPr/>
+          <p:nvPr/>
+        </p:nvSpPr>
+        <p:spPr>
+          <a:xfrm>
+            <a:off x="406301" y="883593"/>
+            <a:ext cx="8331398" cy="1650206"/>
+          </a:xfrm>
+          <a:prstGeom prst="rect">
+            <a:avLst/>
+          </a:prstGeom>
+          <a:solidFill>
+            <a:srgbClr val="F4F8F9"/>
+          </a:solidFill>
+          <a:ln/>
+        </p:spPr>
+        <p:txBody>
+          <a:bodyPr wrap="square" rtlCol="0" anchor="ctr"/>
+          <a:lstStyle/>
+          <a:p>
+            <a:pPr indent="0" marL="0">
+              <a:buNone/>
+            </a:pPr>
+            <a:endParaRPr lang="en-US" dirty="0"/>
+          </a:p>
+        </p:txBody>
+      </p:sp>
+      <p:sp>
+        <p:nvSpPr>
+          <p:cNvPr id="5" name="Shape 3"/>
+          <p:cNvSpPr/>
+          <p:nvPr/>
+        </p:nvSpPr>
+        <p:spPr>
+          <a:xfrm>
+            <a:off x="434876" y="883593"/>
+            <a:ext cx="0" cy="1650206"/>
+          </a:xfrm>
+          <a:prstGeom prst="line">
+            <a:avLst/>
+          </a:prstGeom>
+          <a:noFill/>
+          <a:ln w="57150">
+            <a:solidFill>
+              <a:srgbClr val="FE4447"/>
+            </a:solidFill>
+            <a:prstDash val="solid"/>
+          </a:ln>
+        </p:spPr>
+      </p:sp>
+      <p:sp>
+        <p:nvSpPr>
+          <p:cNvPr id="6" name="Text 4"/>
+          <p:cNvSpPr/>
+          <p:nvPr/>
+        </p:nvSpPr>
+        <p:spPr>
+          <a:xfrm>
+            <a:off x="692051" y="1074093"/>
+            <a:ext cx="7973389" cy="230981"/>
+          </a:xfrm>
+          <a:prstGeom prst="rect">
+            <a:avLst/>
+          </a:prstGeom>
+          <a:noFill/>
+          <a:ln/>
+        </p:spPr>
+        <p:txBody>
+          <a:bodyPr wrap="square" lIns="0" tIns="0" rIns="0" bIns="0" rtlCol="0" anchor="t"/>
+          <a:lstStyle/>
+          <a:p>
+            <a:pPr algn="l" indent="0" marL="0">
+              <a:lnSpc>
+                <a:spcPts val="1820"/>
+              </a:lnSpc>
+              <a:spcBef>
+                <a:spcPts val="300"/>
+              </a:spcBef>
+              <a:spcAft>
+                <a:spcPts val="300"/>
+              </a:spcAft>
+              <a:buNone/>
+            </a:pPr>
+            <a:r>
+              <a:rPr lang="en-US" sz="1300" b="1" i="1" dirty="0">
+                <a:solidFill>
+                  <a:srgbClr val="1C2833"/>
+                </a:solidFill>
+                <a:latin typeface="Georgia" pitchFamily="34" charset="0"/>
+                <a:ea typeface="Georgia" pitchFamily="34" charset="-122"/>
+                <a:cs typeface="Georgia" pitchFamily="34" charset="-120"/>
+              </a:rPr>
+              <a:t>The dot method with carries</a:t>
+            </a:r>
+            <a:endParaRPr lang="en-US" sz="1300" dirty="0"/>
+          </a:p>
+        </p:txBody>
+      </p:sp>
+      <p:sp>
+        <p:nvSpPr>
+          <p:cNvPr id="7" name="Text 5"/>
+          <p:cNvSpPr/>
+          <p:nvPr/>
+        </p:nvSpPr>
+        <p:spPr>
+          <a:xfrm>
+            <a:off x="692051" y="1343174"/>
+            <a:ext cx="7973389" cy="230981"/>
+          </a:xfrm>
+          <a:prstGeom prst="rect">
+            <a:avLst/>
+          </a:prstGeom>
+          <a:noFill/>
+          <a:ln/>
+        </p:spPr>
+        <p:txBody>
+          <a:bodyPr wrap="square" lIns="0" tIns="0" rIns="0" bIns="0" rtlCol="0" anchor="t"/>
+          <a:lstStyle/>
+          <a:p>
+            <a:pPr algn="l" indent="0" marL="0">
+              <a:lnSpc>
+                <a:spcPts val="1820"/>
+              </a:lnSpc>
+              <a:spcBef>
+                <a:spcPts val="300"/>
+              </a:spcBef>
+              <a:spcAft>
+                <a:spcPts val="300"/>
+              </a:spcAft>
+              <a:buNone/>
+            </a:pPr>
+            <a:r>
+              <a:rPr lang="en-US" sz="1300" dirty="0">
+                <a:solidFill>
+                  <a:srgbClr val="1C2833"/>
+                </a:solidFill>
+                <a:latin typeface="Georgia" pitchFamily="34" charset="0"/>
+                <a:ea typeface="Georgia" pitchFamily="34" charset="-122"/>
+                <a:cs typeface="Georgia" pitchFamily="34" charset="-120"/>
+              </a:rPr>
+              <a:t>When you have multiple columns, the dots in column N become the </a:t>
+            </a:r>
+            <a:pPr algn="l" indent="0" marL="0">
+              <a:lnSpc>
+                <a:spcPts val="1820"/>
+              </a:lnSpc>
+              <a:spcBef>
+                <a:spcPts val="300"/>
+              </a:spcBef>
+              <a:spcAft>
+                <a:spcPts val="300"/>
+              </a:spcAft>
+              <a:buNone/>
+            </a:pPr>
+            <a:r>
+              <a:rPr lang="en-US" sz="1300" i="1" dirty="0">
+                <a:solidFill>
+                  <a:srgbClr val="1C2833"/>
+                </a:solidFill>
+                <a:latin typeface="Georgia" pitchFamily="34" charset="0"/>
+                <a:ea typeface="Georgia" pitchFamily="34" charset="-122"/>
+                <a:cs typeface="Georgia" pitchFamily="34" charset="-120"/>
+              </a:rPr>
+              <a:t>carry</a:t>
+            </a:r>
+            <a:pPr algn="l" indent="0" marL="0">
+              <a:lnSpc>
+                <a:spcPts val="1820"/>
+              </a:lnSpc>
+              <a:spcBef>
+                <a:spcPts val="300"/>
+              </a:spcBef>
+              <a:spcAft>
+                <a:spcPts val="300"/>
+              </a:spcAft>
+              <a:buNone/>
+            </a:pPr>
+            <a:r>
+              <a:rPr lang="en-US" sz="1300" dirty="0">
+                <a:solidFill>
+                  <a:srgbClr val="1C2833"/>
+                </a:solidFill>
+                <a:latin typeface="Georgia" pitchFamily="34" charset="0"/>
+                <a:ea typeface="Georgia" pitchFamily="34" charset="-122"/>
+                <a:cs typeface="Georgia" pitchFamily="34" charset="-120"/>
+              </a:rPr>
+              <a:t> added to column N+1.</a:t>
+            </a:r>
+            <a:endParaRPr lang="en-US" sz="1300" dirty="0"/>
+          </a:p>
+        </p:txBody>
+      </p:sp>
+      <p:sp>
+        <p:nvSpPr>
+          <p:cNvPr id="8" name="Text 6"/>
+          <p:cNvSpPr/>
+          <p:nvPr/>
+        </p:nvSpPr>
+        <p:spPr>
+          <a:xfrm>
+            <a:off x="692051" y="1612255"/>
+            <a:ext cx="7973389" cy="461963"/>
+          </a:xfrm>
+          <a:prstGeom prst="rect">
+            <a:avLst/>
+          </a:prstGeom>
+          <a:noFill/>
+          <a:ln/>
+        </p:spPr>
+        <p:txBody>
+          <a:bodyPr wrap="square" lIns="0" tIns="0" rIns="0" bIns="0" rtlCol="0" anchor="t"/>
+          <a:lstStyle/>
+          <a:p>
+            <a:pPr algn="l" indent="0" marL="0">
+              <a:lnSpc>
+                <a:spcPts val="1820"/>
+              </a:lnSpc>
+              <a:spcBef>
+                <a:spcPts val="300"/>
+              </a:spcBef>
+              <a:spcAft>
+                <a:spcPts val="300"/>
+              </a:spcAft>
+              <a:buNone/>
+            </a:pPr>
+            <a:r>
+              <a:rPr lang="en-US" sz="1300" i="1" dirty="0">
+                <a:solidFill>
+                  <a:srgbClr val="1C2833"/>
+                </a:solidFill>
+                <a:latin typeface="Georgia" pitchFamily="34" charset="0"/>
+                <a:ea typeface="Georgia" pitchFamily="34" charset="-122"/>
+                <a:cs typeface="Georgia" pitchFamily="34" charset="-120"/>
+              </a:rPr>
+              <a:t>Add the carry IN the column as you scan — either by including it as a tiny digit at the top of the column, or by adding it to your starting running total.</a:t>
+            </a:r>
+            <a:endParaRPr lang="en-US" sz="1300" dirty="0"/>
+          </a:p>
+        </p:txBody>
+      </p:sp>
+      <p:sp>
+        <p:nvSpPr>
+          <p:cNvPr id="9" name="Text 7"/>
+          <p:cNvSpPr/>
+          <p:nvPr/>
+        </p:nvSpPr>
+        <p:spPr>
+          <a:xfrm>
+            <a:off x="692051" y="2112318"/>
+            <a:ext cx="7973389" cy="230981"/>
+          </a:xfrm>
+          <a:prstGeom prst="rect">
+            <a:avLst/>
+          </a:prstGeom>
+          <a:noFill/>
+          <a:ln/>
+        </p:spPr>
+        <p:txBody>
+          <a:bodyPr wrap="square" lIns="0" tIns="0" rIns="0" bIns="0" rtlCol="0" anchor="t"/>
+          <a:lstStyle/>
+          <a:p>
+            <a:pPr algn="l" indent="0" marL="0">
+              <a:lnSpc>
+                <a:spcPts val="1820"/>
+              </a:lnSpc>
+              <a:spcBef>
+                <a:spcPts val="300"/>
+              </a:spcBef>
+              <a:spcAft>
+                <a:spcPts val="300"/>
+              </a:spcAft>
+              <a:buNone/>
+            </a:pPr>
+            <a:r>
+              <a:rPr lang="en-US" sz="1300" b="1" i="1" dirty="0">
+                <a:solidFill>
+                  <a:srgbClr val="1C2833"/>
+                </a:solidFill>
+                <a:latin typeface="Georgia" pitchFamily="34" charset="0"/>
+                <a:ea typeface="Georgia" pitchFamily="34" charset="-122"/>
+                <a:cs typeface="Georgia" pitchFamily="34" charset="-120"/>
+              </a:rPr>
+              <a:t>Practice this until</a:t>
+            </a:r>
+            <a:pPr algn="l" indent="0" marL="0">
+              <a:lnSpc>
+                <a:spcPts val="1820"/>
+              </a:lnSpc>
+              <a:spcBef>
+                <a:spcPts val="300"/>
+              </a:spcBef>
+              <a:spcAft>
+                <a:spcPts val="300"/>
+              </a:spcAft>
+              <a:buNone/>
+            </a:pPr>
+            <a:r>
+              <a:rPr lang="en-US" sz="1300" dirty="0">
+                <a:solidFill>
+                  <a:srgbClr val="1C2833"/>
+                </a:solidFill>
+                <a:latin typeface="Georgia" pitchFamily="34" charset="0"/>
+                <a:ea typeface="Georgia" pitchFamily="34" charset="-122"/>
+                <a:cs typeface="Georgia" pitchFamily="34" charset="-120"/>
+              </a:rPr>
+              <a:t> you can do a 4×4-digit sum in under 60 seconds.</a:t>
+            </a:r>
+            <a:endParaRPr lang="en-US" sz="1300" dirty="0"/>
+          </a:p>
+        </p:txBody>
+      </p:sp>
+      <p:sp>
+        <p:nvSpPr>
+          <p:cNvPr id="10" name="Text 8"/>
+          <p:cNvSpPr/>
+          <p:nvPr/>
+        </p:nvSpPr>
+        <p:spPr>
+          <a:xfrm>
+            <a:off x="406301" y="4434929"/>
+            <a:ext cx="8498026" cy="213271"/>
+          </a:xfrm>
+          <a:prstGeom prst="rect">
+            <a:avLst/>
+          </a:prstGeom>
+          <a:noFill/>
+          <a:ln/>
+        </p:spPr>
+        <p:txBody>
+          <a:bodyPr wrap="square" lIns="0" tIns="0" rIns="0" bIns="0" rtlCol="0" anchor="t"/>
+          <a:lstStyle/>
+          <a:p>
+            <a:pPr algn="l" indent="0" marL="0">
+              <a:lnSpc>
+                <a:spcPts val="1680"/>
+              </a:lnSpc>
+              <a:spcBef>
+                <a:spcPts val="300"/>
+              </a:spcBef>
+              <a:spcAft>
+                <a:spcPts val="300"/>
+              </a:spcAft>
+              <a:buNone/>
+            </a:pPr>
+            <a:r>
+              <a:rPr lang="en-US" sz="1200" dirty="0">
+                <a:solidFill>
+                  <a:srgbClr val="1C2833"/>
+                </a:solidFill>
+                <a:latin typeface="Arial" pitchFamily="34" charset="0"/>
+                <a:ea typeface="Arial" pitchFamily="34" charset="-122"/>
+                <a:cs typeface="Arial" pitchFamily="34" charset="-120"/>
+              </a:rPr>
+              <a:t>Middle ·  · IKS Curriculum</a:t>
+            </a:r>
+            <a:endParaRPr lang="en-US" sz="1200" dirty="0"/>
+          </a:p>
+        </p:txBody>
+      </p:sp>
+    </p:spTree>
+  </p:cSld>
+  <p:clrMapOvr>
+    <a:masterClrMapping/>
+  </p:clrMapOvr>
+</p:sld>
+</file>
+
+<file path=ppt/slides/slide14.xml><?xml version="1.0" encoding="utf-8"?>
+<p:sld xmlns:a="http://schemas.openxmlformats.org/drawingml/2006/main" xmlns:r="http://schemas.openxmlformats.org/officeDocument/2006/relationships" xmlns:p="http://schemas.openxmlformats.org/presentationml/2006/main">
+  <p:cSld name="Slide 14">
+    <p:bg>
+      <p:bgPr>
+        <a:solidFill>
+          <a:srgbClr val="FFFFFF"/>
+        </a:solidFill>
+      </p:bgPr>
+    </p:bg>
+    <p:spTree>
+      <p:nvGrpSpPr>
+        <p:cNvPr id="1" name=""/>
+        <p:cNvGrpSpPr/>
+        <p:nvPr/>
+      </p:nvGrpSpPr>
+      <p:grpSpPr>
+        <a:xfrm>
+          <a:off x="0" y="0"/>
+          <a:ext cx="0" cy="0"/>
+          <a:chOff x="0" y="0"/>
+          <a:chExt cx="0" cy="0"/>
+        </a:xfrm>
+      </p:grpSpPr>
+      <p:sp>
+        <p:nvSpPr>
+          <p:cNvPr id="2" name="Text 0"/>
+          <p:cNvSpPr/>
+          <p:nvPr/>
+        </p:nvSpPr>
+        <p:spPr>
+          <a:xfrm>
+            <a:off x="0" y="0"/>
+            <a:ext cx="9144000" cy="101501"/>
+          </a:xfrm>
+          <a:prstGeom prst="rect">
+            <a:avLst/>
+          </a:prstGeom>
+          <a:solidFill>
+            <a:srgbClr val="277884"/>
+          </a:solidFill>
+          <a:ln/>
+        </p:spPr>
+        <p:txBody>
+          <a:bodyPr wrap="square" rtlCol="0" anchor="ctr"/>
+          <a:lstStyle/>
+          <a:p>
+            <a:pPr indent="0" marL="0">
+              <a:buNone/>
+            </a:pPr>
+            <a:endParaRPr lang="en-US" dirty="0"/>
+          </a:p>
+        </p:txBody>
+      </p:sp>
+      <p:sp>
+        <p:nvSpPr>
+          <p:cNvPr id="3" name="Text 1"/>
+          <p:cNvSpPr/>
+          <p:nvPr/>
+        </p:nvSpPr>
+        <p:spPr>
+          <a:xfrm>
+            <a:off x="406301" y="457051"/>
+            <a:ext cx="8498026" cy="274290"/>
+          </a:xfrm>
+          <a:prstGeom prst="rect">
+            <a:avLst/>
+          </a:prstGeom>
+          <a:noFill/>
+          <a:ln/>
+        </p:spPr>
+        <p:txBody>
+          <a:bodyPr wrap="square" lIns="0" tIns="0" rIns="0" bIns="0" rtlCol="0" anchor="t"/>
+          <a:lstStyle/>
+          <a:p>
+            <a:pPr algn="l" indent="0" marL="0">
+              <a:lnSpc>
+                <a:spcPts val="2160"/>
+              </a:lnSpc>
+              <a:spcBef>
+                <a:spcPts val="600"/>
+              </a:spcBef>
+              <a:spcAft>
+                <a:spcPts val="800"/>
+              </a:spcAft>
+              <a:buNone/>
+            </a:pPr>
+            <a:r>
+              <a:rPr lang="en-US" sz="1800" b="1" dirty="0">
+                <a:solidFill>
+                  <a:srgbClr val="FE4447"/>
+                </a:solidFill>
+                <a:latin typeface="Georgia" pitchFamily="34" charset="0"/>
+                <a:ea typeface="Georgia" pitchFamily="34" charset="-122"/>
+                <a:cs typeface="Georgia" pitchFamily="34" charset="-120"/>
+              </a:rPr>
+              <a:t>Homework</a:t>
+            </a:r>
+            <a:endParaRPr lang="en-US" sz="1800" dirty="0"/>
+          </a:p>
+        </p:txBody>
+      </p:sp>
+      <p:sp>
+        <p:nvSpPr>
+          <p:cNvPr id="4" name="Text 2"/>
+          <p:cNvSpPr/>
+          <p:nvPr/>
+        </p:nvSpPr>
+        <p:spPr>
+          <a:xfrm>
+            <a:off x="634901" y="883593"/>
+            <a:ext cx="8102798" cy="487561"/>
+          </a:xfrm>
+          <a:prstGeom prst="rect">
+            <a:avLst/>
+          </a:prstGeom>
+          <a:noFill/>
+          <a:ln/>
+        </p:spPr>
+        <p:txBody>
+          <a:bodyPr wrap="square" lIns="0" tIns="0" rIns="0" bIns="0" rtlCol="0" anchor="t"/>
+          <a:lstStyle/>
+          <a:p>
+            <a:pPr algn="l" marL="342900" indent="-342900">
+              <a:lnSpc>
+                <a:spcPts val="1620"/>
+              </a:lnSpc>
+              <a:spcAft>
+                <a:spcPts val="300"/>
+              </a:spcAft>
+              <a:buSzPct val="100000"/>
+              <a:buChar char="•"/>
+            </a:pPr>
+            <a:r>
+              <a:rPr lang="en-US" sz="1200" dirty="0">
+                <a:solidFill>
+                  <a:srgbClr val="1C2833"/>
+                </a:solidFill>
+                <a:latin typeface="Arial" pitchFamily="34" charset="0"/>
+                <a:ea typeface="Arial" pitchFamily="34" charset="-122"/>
+                <a:cs typeface="Arial" pitchFamily="34" charset="-120"/>
+              </a:rPr>
+              <a:t>Find a column-addition problem in any textbook. Solve it BOTH ways (standard + dot method). Time yourself for each. Bring tomorrow.</a:t>
+            </a:r>
+            <a:endParaRPr lang="en-US" sz="1200" dirty="0"/>
+          </a:p>
+        </p:txBody>
+      </p:sp>
+      <p:sp>
+        <p:nvSpPr>
+          <p:cNvPr id="5" name="Text 3"/>
+          <p:cNvSpPr/>
+          <p:nvPr/>
+        </p:nvSpPr>
+        <p:spPr>
+          <a:xfrm>
+            <a:off x="406301" y="4434929"/>
+            <a:ext cx="8498026" cy="213271"/>
+          </a:xfrm>
+          <a:prstGeom prst="rect">
+            <a:avLst/>
+          </a:prstGeom>
+          <a:noFill/>
+          <a:ln/>
+        </p:spPr>
+        <p:txBody>
+          <a:bodyPr wrap="square" lIns="0" tIns="0" rIns="0" bIns="0" rtlCol="0" anchor="t"/>
+          <a:lstStyle/>
+          <a:p>
+            <a:pPr algn="l" indent="0" marL="0">
+              <a:lnSpc>
+                <a:spcPts val="1680"/>
+              </a:lnSpc>
+              <a:spcBef>
+                <a:spcPts val="300"/>
+              </a:spcBef>
+              <a:spcAft>
+                <a:spcPts val="300"/>
+              </a:spcAft>
+              <a:buNone/>
+            </a:pPr>
+            <a:r>
+              <a:rPr lang="en-US" sz="1200" dirty="0">
+                <a:solidFill>
+                  <a:srgbClr val="1C2833"/>
+                </a:solidFill>
+                <a:latin typeface="Arial" pitchFamily="34" charset="0"/>
+                <a:ea typeface="Arial" pitchFamily="34" charset="-122"/>
+                <a:cs typeface="Arial" pitchFamily="34" charset="-120"/>
+              </a:rPr>
+              <a:t>Middle ·  · IKS Curriculum</a:t>
+            </a:r>
+            <a:endParaRPr lang="en-US" sz="1200" dirty="0"/>
+          </a:p>
+        </p:txBody>
+      </p:sp>
+    </p:spTree>
+  </p:cSld>
+  <p:clrMapOvr>
+    <a:masterClrMapping/>
+  </p:clrMapOvr>
+</p:sld>
+</file>
+
+<file path=ppt/slides/slide15.xml><?xml version="1.0" encoding="utf-8"?>
+<p:sld xmlns:a="http://schemas.openxmlformats.org/drawingml/2006/main" xmlns:r="http://schemas.openxmlformats.org/officeDocument/2006/relationships" xmlns:p="http://schemas.openxmlformats.org/presentationml/2006/main">
+  <p:cSld name="Slide 15">
+    <p:bg>
+      <p:bgPr>
+        <a:solidFill>
+          <a:srgbClr val="FFFFFF"/>
+        </a:solidFill>
+      </p:bgPr>
+    </p:bg>
+    <p:spTree>
+      <p:nvGrpSpPr>
+        <p:cNvPr id="1" name=""/>
+        <p:cNvGrpSpPr/>
+        <p:nvPr/>
+      </p:nvGrpSpPr>
+      <p:grpSpPr>
+        <a:xfrm>
+          <a:off x="0" y="0"/>
+          <a:ext cx="0" cy="0"/>
+          <a:chOff x="0" y="0"/>
+          <a:chExt cx="0" cy="0"/>
+        </a:xfrm>
+      </p:grpSpPr>
+      <p:sp>
+        <p:nvSpPr>
+          <p:cNvPr id="2" name="Text 0"/>
+          <p:cNvSpPr/>
+          <p:nvPr/>
+        </p:nvSpPr>
+        <p:spPr>
+          <a:xfrm>
+            <a:off x="0" y="0"/>
+            <a:ext cx="9144000" cy="101501"/>
+          </a:xfrm>
+          <a:prstGeom prst="rect">
+            <a:avLst/>
+          </a:prstGeom>
+          <a:solidFill>
+            <a:srgbClr val="277884"/>
+          </a:solidFill>
+          <a:ln/>
+        </p:spPr>
+        <p:txBody>
+          <a:bodyPr wrap="square" rtlCol="0" anchor="ctr"/>
+          <a:lstStyle/>
+          <a:p>
+            <a:pPr indent="0" marL="0">
+              <a:buNone/>
+            </a:pPr>
+            <a:endParaRPr lang="en-US" dirty="0"/>
+          </a:p>
+        </p:txBody>
+      </p:sp>
+      <p:sp>
+        <p:nvSpPr>
+          <p:cNvPr id="3" name="Text 1"/>
+          <p:cNvSpPr/>
+          <p:nvPr/>
+        </p:nvSpPr>
+        <p:spPr>
+          <a:xfrm>
+            <a:off x="406301" y="457051"/>
+            <a:ext cx="8498026" cy="274290"/>
+          </a:xfrm>
+          <a:prstGeom prst="rect">
+            <a:avLst/>
+          </a:prstGeom>
+          <a:noFill/>
+          <a:ln/>
+        </p:spPr>
+        <p:txBody>
+          <a:bodyPr wrap="square" lIns="0" tIns="0" rIns="0" bIns="0" rtlCol="0" anchor="t"/>
+          <a:lstStyle/>
+          <a:p>
+            <a:pPr algn="l" indent="0" marL="0">
+              <a:lnSpc>
+                <a:spcPts val="2160"/>
+              </a:lnSpc>
+              <a:spcBef>
+                <a:spcPts val="600"/>
+              </a:spcBef>
+              <a:spcAft>
+                <a:spcPts val="800"/>
+              </a:spcAft>
+              <a:buNone/>
+            </a:pPr>
+            <a:r>
+              <a:rPr lang="en-US" sz="1800" b="1" dirty="0">
+                <a:solidFill>
+                  <a:srgbClr val="FE4447"/>
+                </a:solidFill>
+                <a:latin typeface="Georgia" pitchFamily="34" charset="0"/>
+                <a:ea typeface="Georgia" pitchFamily="34" charset="-122"/>
+                <a:cs typeface="Georgia" pitchFamily="34" charset="-120"/>
+              </a:rPr>
+              <a:t>Differentiation</a:t>
+            </a:r>
+            <a:endParaRPr lang="en-US" sz="1800" dirty="0"/>
+          </a:p>
+        </p:txBody>
+      </p:sp>
+      <p:sp>
+        <p:nvSpPr>
+          <p:cNvPr id="4" name="Text 2"/>
+          <p:cNvSpPr/>
+          <p:nvPr/>
+        </p:nvSpPr>
+        <p:spPr>
+          <a:xfrm>
+            <a:off x="634901" y="883593"/>
+            <a:ext cx="8102798" cy="525661"/>
+          </a:xfrm>
+          <a:prstGeom prst="rect">
+            <a:avLst/>
+          </a:prstGeom>
+          <a:noFill/>
+          <a:ln/>
+        </p:spPr>
+        <p:txBody>
+          <a:bodyPr wrap="square" lIns="0" tIns="0" rIns="0" bIns="0" rtlCol="0" anchor="t"/>
+          <a:lstStyle/>
+          <a:p>
+            <a:pPr algn="l" marL="342900" indent="-342900">
+              <a:lnSpc>
+                <a:spcPts val="1620"/>
+              </a:lnSpc>
+              <a:spcAft>
+                <a:spcPts val="300"/>
+              </a:spcAft>
+              <a:buSzPct val="100000"/>
+              <a:buChar char="•"/>
+            </a:pPr>
+            <a:r>
+              <a:rPr lang="en-US" sz="1200" b="1" dirty="0">
+                <a:solidFill>
+                  <a:srgbClr val="1C2833"/>
+                </a:solidFill>
+                <a:latin typeface="Arial" pitchFamily="34" charset="0"/>
+                <a:ea typeface="Arial" pitchFamily="34" charset="-122"/>
+                <a:cs typeface="Arial" pitchFamily="34" charset="-120"/>
+              </a:rPr>
+              <a:t>Tier up:</a:t>
+            </a:r>
+            <a:pPr algn="l" indent="0" marL="0">
+              <a:lnSpc>
+                <a:spcPts val="1620"/>
+              </a:lnSpc>
+              <a:spcAft>
+                <a:spcPts val="300"/>
+              </a:spcAft>
+              <a:buNone/>
+            </a:pPr>
+            <a:r>
+              <a:rPr lang="en-US" sz="1200" dirty="0">
+                <a:solidFill>
+                  <a:srgbClr val="1C2833"/>
+                </a:solidFill>
+                <a:latin typeface="Arial" pitchFamily="34" charset="0"/>
+                <a:ea typeface="Arial" pitchFamily="34" charset="-122"/>
+                <a:cs typeface="Arial" pitchFamily="34" charset="-120"/>
+              </a:rPr>
+              <a:t> 5×5-digit sums; aim for under 90 seconds.</a:t>
+            </a:r>
+            <a:endParaRPr lang="en-US" sz="1200" dirty="0"/>
+          </a:p>
+          <a:p>
+            <a:pPr algn="l" marL="342900" indent="-342900">
+              <a:lnSpc>
+                <a:spcPts val="1620"/>
+              </a:lnSpc>
+              <a:spcAft>
+                <a:spcPts val="300"/>
+              </a:spcAft>
+              <a:buSzPct val="100000"/>
+              <a:buChar char="•"/>
+            </a:pPr>
+            <a:r>
+              <a:rPr lang="en-US" sz="1200" b="1" dirty="0">
+                <a:solidFill>
+                  <a:srgbClr val="1C2833"/>
+                </a:solidFill>
+                <a:latin typeface="Arial" pitchFamily="34" charset="0"/>
+                <a:ea typeface="Arial" pitchFamily="34" charset="-122"/>
+                <a:cs typeface="Arial" pitchFamily="34" charset="-120"/>
+              </a:rPr>
+              <a:t>Tier down:</a:t>
+            </a:r>
+            <a:pPr algn="l" indent="0" marL="0">
+              <a:lnSpc>
+                <a:spcPts val="1620"/>
+              </a:lnSpc>
+              <a:spcAft>
+                <a:spcPts val="300"/>
+              </a:spcAft>
+              <a:buNone/>
+            </a:pPr>
+            <a:r>
+              <a:rPr lang="en-US" sz="1200" dirty="0">
+                <a:solidFill>
+                  <a:srgbClr val="1C2833"/>
+                </a:solidFill>
+                <a:latin typeface="Arial" pitchFamily="34" charset="0"/>
+                <a:ea typeface="Arial" pitchFamily="34" charset="-122"/>
+                <a:cs typeface="Arial" pitchFamily="34" charset="-120"/>
+              </a:rPr>
+              <a:t> 3×3-digit sums until comfortable; scale up.</a:t>
+            </a:r>
+            <a:endParaRPr lang="en-US" sz="1200" dirty="0"/>
+          </a:p>
+        </p:txBody>
+      </p:sp>
+      <p:sp>
+        <p:nvSpPr>
+          <p:cNvPr id="5" name="Text 3"/>
+          <p:cNvSpPr/>
+          <p:nvPr/>
+        </p:nvSpPr>
+        <p:spPr>
+          <a:xfrm>
+            <a:off x="406301" y="4434929"/>
+            <a:ext cx="8498026" cy="213271"/>
+          </a:xfrm>
+          <a:prstGeom prst="rect">
+            <a:avLst/>
+          </a:prstGeom>
+          <a:noFill/>
+          <a:ln/>
+        </p:spPr>
+        <p:txBody>
+          <a:bodyPr wrap="square" lIns="0" tIns="0" rIns="0" bIns="0" rtlCol="0" anchor="t"/>
+          <a:lstStyle/>
+          <a:p>
+            <a:pPr algn="l" indent="0" marL="0">
+              <a:lnSpc>
+                <a:spcPts val="1680"/>
+              </a:lnSpc>
+              <a:spcBef>
+                <a:spcPts val="300"/>
+              </a:spcBef>
+              <a:spcAft>
+                <a:spcPts val="300"/>
+              </a:spcAft>
+              <a:buNone/>
+            </a:pPr>
+            <a:r>
+              <a:rPr lang="en-US" sz="1200" dirty="0">
+                <a:solidFill>
+                  <a:srgbClr val="1C2833"/>
+                </a:solidFill>
+                <a:latin typeface="Arial" pitchFamily="34" charset="0"/>
+                <a:ea typeface="Arial" pitchFamily="34" charset="-122"/>
+                <a:cs typeface="Arial" pitchFamily="34" charset="-120"/>
+              </a:rPr>
+              <a:t>Middle ·  · IKS Curriculum</a:t>
+            </a:r>
+            <a:endParaRPr lang="en-US" sz="1200" dirty="0"/>
+          </a:p>
+        </p:txBody>
+      </p:sp>
+    </p:spTree>
+  </p:cSld>
+  <p:clrMapOvr>
+    <a:masterClrMapping/>
+  </p:clrMapOvr>
+</p:sld>
+</file>
+
+<file path=ppt/slides/slide16.xml><?xml version="1.0" encoding="utf-8"?>
+<p:sld xmlns:a="http://schemas.openxmlformats.org/drawingml/2006/main" xmlns:r="http://schemas.openxmlformats.org/officeDocument/2006/relationships" xmlns:p="http://schemas.openxmlformats.org/presentationml/2006/main">
+  <p:cSld name="Slide 16">
+    <p:bg>
+      <p:bgPr>
+        <a:solidFill>
+          <a:srgbClr val="FFFFFF"/>
+        </a:solidFill>
+      </p:bgPr>
+    </p:bg>
+    <p:spTree>
+      <p:nvGrpSpPr>
+        <p:cNvPr id="1" name=""/>
+        <p:cNvGrpSpPr/>
+        <p:nvPr/>
+      </p:nvGrpSpPr>
+      <p:grpSpPr>
+        <a:xfrm>
+          <a:off x="0" y="0"/>
+          <a:ext cx="0" cy="0"/>
+          <a:chOff x="0" y="0"/>
+          <a:chExt cx="0" cy="0"/>
+        </a:xfrm>
+      </p:grpSpPr>
+      <p:sp>
+        <p:nvSpPr>
+          <p:cNvPr id="2" name="Text 0"/>
+          <p:cNvSpPr/>
+          <p:nvPr/>
+        </p:nvSpPr>
+        <p:spPr>
+          <a:xfrm>
+            <a:off x="0" y="0"/>
+            <a:ext cx="9144000" cy="101501"/>
+          </a:xfrm>
+          <a:prstGeom prst="rect">
+            <a:avLst/>
+          </a:prstGeom>
+          <a:solidFill>
+            <a:srgbClr val="277884"/>
+          </a:solidFill>
+          <a:ln/>
+        </p:spPr>
+        <p:txBody>
+          <a:bodyPr wrap="square" rtlCol="0" anchor="ctr"/>
+          <a:lstStyle/>
+          <a:p>
+            <a:pPr indent="0" marL="0">
+              <a:buNone/>
+            </a:pPr>
+            <a:endParaRPr lang="en-US" dirty="0"/>
+          </a:p>
+        </p:txBody>
+      </p:sp>
+      <p:sp>
+        <p:nvSpPr>
+          <p:cNvPr id="3" name="Text 1"/>
+          <p:cNvSpPr/>
+          <p:nvPr/>
+        </p:nvSpPr>
+        <p:spPr>
+          <a:xfrm>
+            <a:off x="406301" y="457051"/>
+            <a:ext cx="8498026" cy="274290"/>
+          </a:xfrm>
+          <a:prstGeom prst="rect">
+            <a:avLst/>
+          </a:prstGeom>
+          <a:noFill/>
+          <a:ln/>
+        </p:spPr>
+        <p:txBody>
+          <a:bodyPr wrap="square" lIns="0" tIns="0" rIns="0" bIns="0" rtlCol="0" anchor="t"/>
+          <a:lstStyle/>
+          <a:p>
+            <a:pPr algn="l" indent="0" marL="0">
+              <a:lnSpc>
+                <a:spcPts val="2160"/>
+              </a:lnSpc>
+              <a:spcBef>
+                <a:spcPts val="600"/>
+              </a:spcBef>
+              <a:spcAft>
+                <a:spcPts val="800"/>
+              </a:spcAft>
+              <a:buNone/>
+            </a:pPr>
+            <a:r>
+              <a:rPr lang="en-US" sz="1800" b="1" dirty="0">
+                <a:solidFill>
+                  <a:srgbClr val="FE4447"/>
+                </a:solidFill>
+                <a:latin typeface="Georgia" pitchFamily="34" charset="0"/>
+                <a:ea typeface="Georgia" pitchFamily="34" charset="-122"/>
+                <a:cs typeface="Georgia" pitchFamily="34" charset="-120"/>
+              </a:rPr>
+              <a:t>Teacher notes</a:t>
+            </a:r>
+            <a:endParaRPr lang="en-US" sz="1800" dirty="0"/>
+          </a:p>
+        </p:txBody>
+      </p:sp>
+      <p:sp>
+        <p:nvSpPr>
+          <p:cNvPr id="4" name="Text 2"/>
+          <p:cNvSpPr/>
+          <p:nvPr/>
+        </p:nvSpPr>
+        <p:spPr>
+          <a:xfrm>
+            <a:off x="634901" y="883593"/>
+            <a:ext cx="8102798" cy="1218902"/>
+          </a:xfrm>
+          <a:prstGeom prst="rect">
+            <a:avLst/>
+          </a:prstGeom>
+          <a:noFill/>
+          <a:ln/>
+        </p:spPr>
+        <p:txBody>
+          <a:bodyPr wrap="square" lIns="0" tIns="0" rIns="0" bIns="0" rtlCol="0" anchor="t"/>
+          <a:lstStyle/>
+          <a:p>
+            <a:pPr algn="l" marL="342900" indent="-342900">
+              <a:lnSpc>
+                <a:spcPts val="1620"/>
+              </a:lnSpc>
+              <a:spcAft>
+                <a:spcPts val="300"/>
+              </a:spcAft>
+              <a:buSzPct val="100000"/>
+              <a:buChar char="•"/>
+            </a:pPr>
+            <a:r>
+              <a:rPr lang="en-US" sz="1200" dirty="0">
+                <a:solidFill>
+                  <a:srgbClr val="1C2833"/>
+                </a:solidFill>
+                <a:latin typeface="Arial" pitchFamily="34" charset="0"/>
+                <a:ea typeface="Arial" pitchFamily="34" charset="-122"/>
+                <a:cs typeface="Arial" pitchFamily="34" charset="-120"/>
+              </a:rPr>
+              <a:t>The carry handoff is where most errors happen. Two common patterns:</a:t>
+            </a:r>
+            <a:endParaRPr lang="en-US" sz="1200" dirty="0"/>
+          </a:p>
+          <a:p>
+            <a:pPr algn="l" marL="342900" indent="-342900">
+              <a:lnSpc>
+                <a:spcPts val="1620"/>
+              </a:lnSpc>
+              <a:spcAft>
+                <a:spcPts val="300"/>
+              </a:spcAft>
+              <a:buSzPct val="100000"/>
+              <a:buChar char="•"/>
+            </a:pPr>
+            <a:r>
+              <a:rPr lang="en-US" sz="1200" dirty="0">
+                <a:solidFill>
+                  <a:srgbClr val="1C2833"/>
+                </a:solidFill>
+                <a:latin typeface="Arial" pitchFamily="34" charset="0"/>
+                <a:ea typeface="Arial" pitchFamily="34" charset="-122"/>
+                <a:cs typeface="Arial" pitchFamily="34" charset="-120"/>
+              </a:rPr>
+              <a:t>Forgetting to include the carry in the next column.</a:t>
+            </a:r>
+            <a:endParaRPr lang="en-US" sz="1200" dirty="0"/>
+          </a:p>
+          <a:p>
+            <a:pPr algn="l" marL="342900" indent="-342900">
+              <a:lnSpc>
+                <a:spcPts val="1620"/>
+              </a:lnSpc>
+              <a:spcAft>
+                <a:spcPts val="300"/>
+              </a:spcAft>
+              <a:buSzPct val="100000"/>
+              <a:buChar char="•"/>
+            </a:pPr>
+            <a:r>
+              <a:rPr lang="en-US" sz="1200" dirty="0">
+                <a:solidFill>
+                  <a:srgbClr val="1C2833"/>
+                </a:solidFill>
+                <a:latin typeface="Arial" pitchFamily="34" charset="0"/>
+                <a:ea typeface="Arial" pitchFamily="34" charset="-122"/>
+                <a:cs typeface="Arial" pitchFamily="34" charset="-120"/>
+              </a:rPr>
+              <a:t>Including it twice (once as the carry, once as part of the running total).</a:t>
+            </a:r>
+            <a:endParaRPr lang="en-US" sz="1200" dirty="0"/>
+          </a:p>
+          <a:p>
+            <a:pPr algn="l" marL="342900" indent="-342900">
+              <a:lnSpc>
+                <a:spcPts val="1620"/>
+              </a:lnSpc>
+              <a:spcAft>
+                <a:spcPts val="300"/>
+              </a:spcAft>
+              <a:buSzPct val="100000"/>
+              <a:buChar char="•"/>
+            </a:pPr>
+            <a:r>
+              <a:rPr lang="en-US" sz="1200" dirty="0">
+                <a:solidFill>
+                  <a:srgbClr val="1C2833"/>
+                </a:solidFill>
+                <a:latin typeface="Arial" pitchFamily="34" charset="0"/>
+                <a:ea typeface="Arial" pitchFamily="34" charset="-122"/>
+                <a:cs typeface="Arial" pitchFamily="34" charset="-120"/>
+              </a:rPr>
+              <a:t>For each, slow down with the student and have them write the carry IN the column as a small digit before they start scanning.</a:t>
+            </a:r>
+            <a:endParaRPr lang="en-US" sz="1200" dirty="0"/>
+          </a:p>
+        </p:txBody>
+      </p:sp>
+      <p:sp>
+        <p:nvSpPr>
+          <p:cNvPr id="5" name="Text 3"/>
+          <p:cNvSpPr/>
+          <p:nvPr/>
+        </p:nvSpPr>
+        <p:spPr>
+          <a:xfrm>
+            <a:off x="406301" y="4434929"/>
+            <a:ext cx="8498026" cy="213271"/>
+          </a:xfrm>
+          <a:prstGeom prst="rect">
+            <a:avLst/>
+          </a:prstGeom>
+          <a:noFill/>
+          <a:ln/>
+        </p:spPr>
+        <p:txBody>
+          <a:bodyPr wrap="square" lIns="0" tIns="0" rIns="0" bIns="0" rtlCol="0" anchor="t"/>
+          <a:lstStyle/>
+          <a:p>
+            <a:pPr algn="l" indent="0" marL="0">
+              <a:lnSpc>
+                <a:spcPts val="1680"/>
+              </a:lnSpc>
+              <a:spcBef>
+                <a:spcPts val="300"/>
+              </a:spcBef>
+              <a:spcAft>
+                <a:spcPts val="300"/>
+              </a:spcAft>
+              <a:buNone/>
+            </a:pPr>
+            <a:r>
+              <a:rPr lang="en-US" sz="1200" dirty="0">
+                <a:solidFill>
+                  <a:srgbClr val="1C2833"/>
+                </a:solidFill>
+                <a:latin typeface="Arial" pitchFamily="34" charset="0"/>
+                <a:ea typeface="Arial" pitchFamily="34" charset="-122"/>
+                <a:cs typeface="Arial" pitchFamily="34" charset="-120"/>
+              </a:rPr>
+              <a:t>Middle ·  · IKS Curriculum</a:t>
+            </a:r>
+            <a:endParaRPr lang="en-US" sz="1200" dirty="0"/>
+          </a:p>
+        </p:txBody>
+      </p:sp>
+    </p:spTree>
+  </p:cSld>
+  <p:clrMapOvr>
+    <a:masterClrMapping/>
+  </p:clrMapOvr>
+</p:sld>
+</file>
+
+<file path=ppt/slides/slide17.xml><?xml version="1.0" encoding="utf-8"?>
+<p:sld xmlns:a="http://schemas.openxmlformats.org/drawingml/2006/main" xmlns:r="http://schemas.openxmlformats.org/officeDocument/2006/relationships" xmlns:p="http://schemas.openxmlformats.org/presentationml/2006/main">
+  <p:cSld name="Slide 17">
+    <p:bg>
+      <p:bgPr>
+        <a:solidFill>
+          <a:srgbClr val="FFFFFF"/>
+        </a:solidFill>
+      </p:bgPr>
+    </p:bg>
+    <p:spTree>
+      <p:nvGrpSpPr>
+        <p:cNvPr id="1" name=""/>
+        <p:cNvGrpSpPr/>
+        <p:nvPr/>
+      </p:nvGrpSpPr>
+      <p:grpSpPr>
+        <a:xfrm>
+          <a:off x="0" y="0"/>
+          <a:ext cx="0" cy="0"/>
+          <a:chOff x="0" y="0"/>
+          <a:chExt cx="0" cy="0"/>
+        </a:xfrm>
+      </p:grpSpPr>
+      <p:sp>
+        <p:nvSpPr>
+          <p:cNvPr id="2" name="Text 0"/>
+          <p:cNvSpPr/>
+          <p:nvPr/>
+        </p:nvSpPr>
+        <p:spPr>
+          <a:xfrm>
+            <a:off x="0" y="0"/>
+            <a:ext cx="9144000" cy="101501"/>
+          </a:xfrm>
+          <a:prstGeom prst="rect">
+            <a:avLst/>
+          </a:prstGeom>
+          <a:solidFill>
+            <a:srgbClr val="277884"/>
+          </a:solidFill>
+          <a:ln/>
+        </p:spPr>
+        <p:txBody>
+          <a:bodyPr wrap="square" rtlCol="0" anchor="ctr"/>
+          <a:lstStyle/>
+          <a:p>
+            <a:pPr indent="0" marL="0">
+              <a:buNone/>
+            </a:pPr>
+            <a:endParaRPr lang="en-US" dirty="0"/>
+          </a:p>
+        </p:txBody>
+      </p:sp>
+      <p:sp>
+        <p:nvSpPr>
+          <p:cNvPr id="3" name="Text 1"/>
+          <p:cNvSpPr/>
+          <p:nvPr/>
+        </p:nvSpPr>
+        <p:spPr>
+          <a:xfrm>
+            <a:off x="406301" y="457051"/>
+            <a:ext cx="8498026" cy="274290"/>
+          </a:xfrm>
+          <a:prstGeom prst="rect">
+            <a:avLst/>
+          </a:prstGeom>
+          <a:noFill/>
+          <a:ln/>
+        </p:spPr>
+        <p:txBody>
+          <a:bodyPr wrap="square" lIns="0" tIns="0" rIns="0" bIns="0" rtlCol="0" anchor="t"/>
+          <a:lstStyle/>
+          <a:p>
+            <a:pPr algn="l" indent="0" marL="0">
+              <a:lnSpc>
+                <a:spcPts val="2160"/>
+              </a:lnSpc>
+              <a:spcBef>
+                <a:spcPts val="600"/>
+              </a:spcBef>
+              <a:spcAft>
+                <a:spcPts val="800"/>
+              </a:spcAft>
+              <a:buNone/>
+            </a:pPr>
+            <a:r>
+              <a:rPr lang="en-US" sz="1800" b="1" dirty="0">
+                <a:solidFill>
+                  <a:srgbClr val="FE4447"/>
+                </a:solidFill>
+                <a:latin typeface="Georgia" pitchFamily="34" charset="0"/>
+                <a:ea typeface="Georgia" pitchFamily="34" charset="-122"/>
+                <a:cs typeface="Georgia" pitchFamily="34" charset="-120"/>
+              </a:rPr>
               <a:t>Citation(s) used in this lesson</a:t>
             </a:r>
             <a:endParaRPr lang="en-US" sz="1800" dirty="0"/>
@@ -3038,7 +4982,7 @@
                 <a:ea typeface="Georgia" pitchFamily="34" charset="-122"/>
                 <a:cs typeface="Georgia" pitchFamily="34" charset="-120"/>
               </a:rPr>
-              <a:t>Materials</a:t>
+              <a:t>Learning objective</a:t>
             </a:r>
             <a:endParaRPr lang="en-US" sz="1800" dirty="0"/>
           </a:p>
@@ -3086,7 +5030,7 @@
                 <a:ea typeface="Arial" pitchFamily="34" charset="-122"/>
                 <a:cs typeface="Arial" pitchFamily="34" charset="-120"/>
               </a:rPr>
-              <a:t>– Day 3 formative quiz returned with marks. – Worksheet: 8 multi-column problems (varying from 3×3-digit to 5×4-digit). – Whiteboard / large grid paper. – Stopwatch.</a:t>
+              <a:t>By the end of this lesson, students will add a 4-addend × 4-digit column-sum using the dot method, correctly propagating carries between columns.</a:t>
             </a:r>
             <a:endParaRPr lang="en-US" sz="1200" dirty="0"/>
           </a:p>
@@ -3244,7 +5188,7 @@
                 <a:ea typeface="Georgia" pitchFamily="34" charset="-122"/>
                 <a:cs typeface="Georgia" pitchFamily="34" charset="-120"/>
               </a:rPr>
-              <a:t>Lesson flow</a:t>
+              <a:t>Materials</a:t>
             </a:r>
             <a:endParaRPr lang="en-US" sz="1800" dirty="0"/>
           </a:p>
@@ -3253,6 +5197,124 @@
       <p:sp>
         <p:nvSpPr>
           <p:cNvPr id="4" name="Text 2"/>
+          <p:cNvSpPr/>
+          <p:nvPr/>
+        </p:nvSpPr>
+        <p:spPr>
+          <a:xfrm>
+            <a:off x="634901" y="883593"/>
+            <a:ext cx="8102798" cy="1013222"/>
+          </a:xfrm>
+          <a:prstGeom prst="rect">
+            <a:avLst/>
+          </a:prstGeom>
+          <a:noFill/>
+          <a:ln/>
+        </p:spPr>
+        <p:txBody>
+          <a:bodyPr wrap="square" lIns="0" tIns="0" rIns="0" bIns="0" rtlCol="0" anchor="t"/>
+          <a:lstStyle/>
+          <a:p>
+            <a:pPr algn="l" marL="342900" indent="-342900">
+              <a:lnSpc>
+                <a:spcPts val="1620"/>
+              </a:lnSpc>
+              <a:spcAft>
+                <a:spcPts val="300"/>
+              </a:spcAft>
+              <a:buSzPct val="100000"/>
+              <a:buChar char="•"/>
+            </a:pPr>
+            <a:r>
+              <a:rPr lang="en-US" sz="1200" dirty="0">
+                <a:solidFill>
+                  <a:srgbClr val="1C2833"/>
+                </a:solidFill>
+                <a:latin typeface="Arial" pitchFamily="34" charset="0"/>
+                <a:ea typeface="Arial" pitchFamily="34" charset="-122"/>
+                <a:cs typeface="Arial" pitchFamily="34" charset="-120"/>
+              </a:rPr>
+              <a:t>Day 3 formative quiz returned with marks.</a:t>
+            </a:r>
+            <a:endParaRPr lang="en-US" sz="1200" dirty="0"/>
+          </a:p>
+          <a:p>
+            <a:pPr algn="l" marL="342900" indent="-342900">
+              <a:lnSpc>
+                <a:spcPts val="1620"/>
+              </a:lnSpc>
+              <a:spcAft>
+                <a:spcPts val="300"/>
+              </a:spcAft>
+              <a:buSzPct val="100000"/>
+              <a:buChar char="•"/>
+            </a:pPr>
+            <a:r>
+              <a:rPr lang="en-US" sz="1200" dirty="0">
+                <a:solidFill>
+                  <a:srgbClr val="1C2833"/>
+                </a:solidFill>
+                <a:latin typeface="Arial" pitchFamily="34" charset="0"/>
+                <a:ea typeface="Arial" pitchFamily="34" charset="-122"/>
+                <a:cs typeface="Arial" pitchFamily="34" charset="-120"/>
+              </a:rPr>
+              <a:t>Worksheet: 8 multi-column problems (varying from 3×3-digit to 5×4-digit).</a:t>
+            </a:r>
+            <a:endParaRPr lang="en-US" sz="1200" dirty="0"/>
+          </a:p>
+          <a:p>
+            <a:pPr algn="l" marL="342900" indent="-342900">
+              <a:lnSpc>
+                <a:spcPts val="1620"/>
+              </a:lnSpc>
+              <a:spcAft>
+                <a:spcPts val="300"/>
+              </a:spcAft>
+              <a:buSzPct val="100000"/>
+              <a:buChar char="•"/>
+            </a:pPr>
+            <a:r>
+              <a:rPr lang="en-US" sz="1200" dirty="0">
+                <a:solidFill>
+                  <a:srgbClr val="1C2833"/>
+                </a:solidFill>
+                <a:latin typeface="Arial" pitchFamily="34" charset="0"/>
+                <a:ea typeface="Arial" pitchFamily="34" charset="-122"/>
+                <a:cs typeface="Arial" pitchFamily="34" charset="-120"/>
+              </a:rPr>
+              <a:t>Whiteboard / large grid paper.</a:t>
+            </a:r>
+            <a:endParaRPr lang="en-US" sz="1200" dirty="0"/>
+          </a:p>
+          <a:p>
+            <a:pPr algn="l" marL="342900" indent="-342900">
+              <a:lnSpc>
+                <a:spcPts val="1620"/>
+              </a:lnSpc>
+              <a:spcAft>
+                <a:spcPts val="300"/>
+              </a:spcAft>
+              <a:buSzPct val="100000"/>
+              <a:buChar char="•"/>
+            </a:pPr>
+            <a:r>
+              <a:rPr lang="en-US" sz="1200" dirty="0">
+                <a:solidFill>
+                  <a:srgbClr val="1C2833"/>
+                </a:solidFill>
+                <a:latin typeface="Arial" pitchFamily="34" charset="0"/>
+                <a:ea typeface="Arial" pitchFamily="34" charset="-122"/>
+                <a:cs typeface="Arial" pitchFamily="34" charset="-120"/>
+              </a:rPr>
+              <a:t>Stopwatch.</a:t>
+            </a:r>
+            <a:endParaRPr lang="en-US" sz="1200" dirty="0"/>
+          </a:p>
+        </p:txBody>
+      </p:sp>
+      <p:sp>
+        <p:nvSpPr>
+          <p:cNvPr id="5" name="Text 3"/>
           <p:cNvSpPr/>
           <p:nvPr/>
         </p:nvSpPr>
@@ -3402,7 +5464,7 @@
                 <a:ea typeface="Georgia" pitchFamily="34" charset="-122"/>
                 <a:cs typeface="Georgia" pitchFamily="34" charset="-120"/>
               </a:rPr>
-              <a:t>Warm-up (5 min)</a:t>
+              <a:t>Lesson flow</a:t>
             </a:r>
             <a:endParaRPr lang="en-US" sz="1800" dirty="0"/>
           </a:p>
@@ -3411,54 +5473,6 @@
       <p:sp>
         <p:nvSpPr>
           <p:cNvPr id="4" name="Text 2"/>
-          <p:cNvSpPr/>
-          <p:nvPr/>
-        </p:nvSpPr>
-        <p:spPr>
-          <a:xfrm>
-            <a:off x="406301" y="870942"/>
-            <a:ext cx="8498026" cy="213271"/>
-          </a:xfrm>
-          <a:prstGeom prst="rect">
-            <a:avLst/>
-          </a:prstGeom>
-          <a:noFill/>
-          <a:ln/>
-        </p:spPr>
-        <p:txBody>
-          <a:bodyPr wrap="square" lIns="0" tIns="0" rIns="0" bIns="0" rtlCol="0" anchor="t"/>
-          <a:lstStyle/>
-          <a:p>
-            <a:pPr algn="l" indent="0" marL="0">
-              <a:lnSpc>
-                <a:spcPts val="1680"/>
-              </a:lnSpc>
-              <a:spcBef>
-                <a:spcPts val="300"/>
-              </a:spcBef>
-              <a:spcAft>
-                <a:spcPts val="300"/>
-              </a:spcAft>
-              <a:buNone/>
-            </a:pPr>
-            <a:r>
-              <a:rPr lang="en-US" sz="1200" dirty="0">
-                <a:solidFill>
-                  <a:srgbClr val="1C2833"/>
-                </a:solidFill>
-                <a:latin typeface="Arial" pitchFamily="34" charset="0"/>
-                <a:ea typeface="Arial" pitchFamily="34" charset="-122"/>
-                <a:cs typeface="Arial" pitchFamily="34" charset="-120"/>
-              </a:rPr>
-              <a:t>– Make-10 lightning round. – Hand back yesterday's formative. Don't review — students see their marks privately.</a:t>
-            </a:r>
-            <a:endParaRPr lang="en-US" sz="1200" dirty="0"/>
-          </a:p>
-        </p:txBody>
-      </p:sp>
-      <p:sp>
-        <p:nvSpPr>
-          <p:cNvPr id="5" name="Text 3"/>
           <p:cNvSpPr/>
           <p:nvPr/>
         </p:nvSpPr>
@@ -3608,7 +5622,7 @@
                 <a:ea typeface="Georgia" pitchFamily="34" charset="-122"/>
                 <a:cs typeface="Georgia" pitchFamily="34" charset="-120"/>
               </a:rPr>
-              <a:t>Core (10 min) — The carry handoff</a:t>
+              <a:t>Warm-up (5 min)</a:t>
             </a:r>
             <a:endParaRPr lang="en-US" sz="1800" dirty="0"/>
           </a:p>
@@ -3622,8 +5636,8 @@
         </p:nvSpPr>
         <p:spPr>
           <a:xfrm>
-            <a:off x="406301" y="870942"/>
-            <a:ext cx="8498026" cy="213271"/>
+            <a:off x="634901" y="883593"/>
+            <a:ext cx="8102798" cy="525661"/>
           </a:xfrm>
           <a:prstGeom prst="rect">
             <a:avLst/>
@@ -3635,17 +5649,15 @@
           <a:bodyPr wrap="square" lIns="0" tIns="0" rIns="0" bIns="0" rtlCol="0" anchor="t"/>
           <a:lstStyle/>
           <a:p>
-            <a:pPr algn="l" indent="0" marL="0">
-              <a:lnSpc>
-                <a:spcPts val="1680"/>
-              </a:lnSpc>
-              <a:spcBef>
-                <a:spcPts val="300"/>
-              </a:spcBef>
-              <a:spcAft>
-                <a:spcPts val="300"/>
-              </a:spcAft>
-              <a:buNone/>
+            <a:pPr algn="l" marL="342900" indent="-342900">
+              <a:lnSpc>
+                <a:spcPts val="1620"/>
+              </a:lnSpc>
+              <a:spcAft>
+                <a:spcPts val="300"/>
+              </a:spcAft>
+              <a:buSzPct val="100000"/>
+              <a:buChar char="•"/>
             </a:pPr>
             <a:r>
               <a:rPr lang="en-US" sz="1200" dirty="0">
@@ -3656,268 +5668,23 @@
                 <a:ea typeface="Arial" pitchFamily="34" charset="-122"/>
                 <a:cs typeface="Arial" pitchFamily="34" charset="-120"/>
               </a:rPr>
-              <a:t>– Demonstrate on the board:</a:t>
+              <a:t>Make-10 lightning round.</a:t>
             </a:r>
             <a:endParaRPr lang="en-US" sz="1200" dirty="0"/>
           </a:p>
-        </p:txBody>
-      </p:sp>
-      <p:sp>
-        <p:nvSpPr>
-          <p:cNvPr id="5" name="Text 3"/>
-          <p:cNvSpPr/>
-          <p:nvPr/>
-        </p:nvSpPr>
-        <p:spPr>
-          <a:xfrm>
-            <a:off x="406301" y="1173063"/>
-            <a:ext cx="8331398" cy="952202"/>
-          </a:xfrm>
-          <a:prstGeom prst="rect">
-            <a:avLst/>
-          </a:prstGeom>
-          <a:solidFill>
-            <a:srgbClr val="F4F8F9"/>
-          </a:solidFill>
-          <a:ln/>
-        </p:spPr>
-        <p:txBody>
-          <a:bodyPr wrap="square" rtlCol="0" anchor="ctr"/>
-          <a:lstStyle/>
-          <a:p>
-            <a:pPr indent="0" marL="0">
-              <a:buNone/>
-            </a:pPr>
-            <a:endParaRPr lang="en-US" dirty="0"/>
-          </a:p>
-        </p:txBody>
-      </p:sp>
-      <p:sp>
-        <p:nvSpPr>
-          <p:cNvPr id="6" name="Shape 4"/>
-          <p:cNvSpPr/>
-          <p:nvPr/>
-        </p:nvSpPr>
-        <p:spPr>
-          <a:xfrm>
-            <a:off x="430113" y="1173063"/>
-            <a:ext cx="0" cy="952202"/>
-          </a:xfrm>
-          <a:prstGeom prst="line">
-            <a:avLst/>
-          </a:prstGeom>
-          <a:noFill/>
-          <a:ln w="47625">
-            <a:solidFill>
-              <a:srgbClr val="277884"/>
-            </a:solidFill>
-            <a:prstDash val="solid"/>
-          </a:ln>
-        </p:spPr>
-      </p:sp>
-      <p:sp>
-        <p:nvSpPr>
-          <p:cNvPr id="7" name="Text 5"/>
-          <p:cNvSpPr/>
-          <p:nvPr/>
-        </p:nvSpPr>
-        <p:spPr>
-          <a:xfrm>
-            <a:off x="631627" y="1300014"/>
-            <a:ext cx="8086939" cy="174575"/>
-          </a:xfrm>
-          <a:prstGeom prst="rect">
-            <a:avLst/>
-          </a:prstGeom>
-          <a:noFill/>
-          <a:ln/>
-        </p:spPr>
-        <p:txBody>
-          <a:bodyPr wrap="square" lIns="0" tIns="0" rIns="0" bIns="0" rtlCol="0" anchor="t"/>
-          <a:lstStyle/>
-          <a:p>
-            <a:pPr algn="l" indent="0" marL="0">
-              <a:lnSpc>
-                <a:spcPts val="1375"/>
-              </a:lnSpc>
-              <a:buNone/>
-            </a:pPr>
-            <a:r>
-              <a:rPr lang="en-US" sz="1100" dirty="0">
-                <a:solidFill>
-                  <a:srgbClr val="1C2833"/>
-                </a:solidFill>
-                <a:latin typeface="Courier New" pitchFamily="34" charset="0"/>
-                <a:ea typeface="Courier New" pitchFamily="34" charset="-122"/>
-                <a:cs typeface="Courier New" pitchFamily="34" charset="-120"/>
-              </a:rPr>
-              <a:t>5728</a:t>
-            </a:r>
-            <a:endParaRPr lang="en-US" sz="1100" dirty="0"/>
-          </a:p>
-        </p:txBody>
-      </p:sp>
-      <p:sp>
-        <p:nvSpPr>
-          <p:cNvPr id="8" name="Text 6"/>
-          <p:cNvSpPr/>
-          <p:nvPr/>
-        </p:nvSpPr>
-        <p:spPr>
-          <a:xfrm>
-            <a:off x="631627" y="1474589"/>
-            <a:ext cx="8086939" cy="174575"/>
-          </a:xfrm>
-          <a:prstGeom prst="rect">
-            <a:avLst/>
-          </a:prstGeom>
-          <a:noFill/>
-          <a:ln/>
-        </p:spPr>
-        <p:txBody>
-          <a:bodyPr wrap="square" lIns="0" tIns="0" rIns="0" bIns="0" rtlCol="0" anchor="t"/>
-          <a:lstStyle/>
-          <a:p>
-            <a:pPr algn="l" indent="0" marL="0">
-              <a:lnSpc>
-                <a:spcPts val="1375"/>
-              </a:lnSpc>
-              <a:buNone/>
-            </a:pPr>
-            <a:r>
-              <a:rPr lang="en-US" sz="1100" dirty="0">
-                <a:solidFill>
-                  <a:srgbClr val="1C2833"/>
-                </a:solidFill>
-                <a:latin typeface="Courier New" pitchFamily="34" charset="0"/>
-                <a:ea typeface="Courier New" pitchFamily="34" charset="-122"/>
-                <a:cs typeface="Courier New" pitchFamily="34" charset="-120"/>
-              </a:rPr>
-              <a:t>3417</a:t>
-            </a:r>
-            <a:endParaRPr lang="en-US" sz="1100" dirty="0"/>
-          </a:p>
-        </p:txBody>
-      </p:sp>
-      <p:sp>
-        <p:nvSpPr>
-          <p:cNvPr id="9" name="Text 7"/>
-          <p:cNvSpPr/>
-          <p:nvPr/>
-        </p:nvSpPr>
-        <p:spPr>
-          <a:xfrm>
-            <a:off x="631627" y="1649164"/>
-            <a:ext cx="8086939" cy="174575"/>
-          </a:xfrm>
-          <a:prstGeom prst="rect">
-            <a:avLst/>
-          </a:prstGeom>
-          <a:noFill/>
-          <a:ln/>
-        </p:spPr>
-        <p:txBody>
-          <a:bodyPr wrap="square" lIns="0" tIns="0" rIns="0" bIns="0" rtlCol="0" anchor="t"/>
-          <a:lstStyle/>
-          <a:p>
-            <a:pPr algn="l" indent="0" marL="0">
-              <a:lnSpc>
-                <a:spcPts val="1375"/>
-              </a:lnSpc>
-              <a:buNone/>
-            </a:pPr>
-            <a:r>
-              <a:rPr lang="en-US" sz="1100" dirty="0">
-                <a:solidFill>
-                  <a:srgbClr val="1C2833"/>
-                </a:solidFill>
-                <a:latin typeface="Courier New" pitchFamily="34" charset="0"/>
-                <a:ea typeface="Courier New" pitchFamily="34" charset="-122"/>
-                <a:cs typeface="Courier New" pitchFamily="34" charset="-120"/>
-              </a:rPr>
-              <a:t>6892</a:t>
-            </a:r>
-            <a:endParaRPr lang="en-US" sz="1100" dirty="0"/>
-          </a:p>
-        </p:txBody>
-      </p:sp>
-      <p:sp>
-        <p:nvSpPr>
-          <p:cNvPr id="10" name="Text 8"/>
-          <p:cNvSpPr/>
-          <p:nvPr/>
-        </p:nvSpPr>
-        <p:spPr>
-          <a:xfrm>
-            <a:off x="631627" y="1823740"/>
-            <a:ext cx="8086939" cy="174575"/>
-          </a:xfrm>
-          <a:prstGeom prst="rect">
-            <a:avLst/>
-          </a:prstGeom>
-          <a:noFill/>
-          <a:ln/>
-        </p:spPr>
-        <p:txBody>
-          <a:bodyPr wrap="square" lIns="0" tIns="0" rIns="0" bIns="0" rtlCol="0" anchor="t"/>
-          <a:lstStyle/>
-          <a:p>
-            <a:pPr algn="l" indent="0" marL="0">
-              <a:lnSpc>
-                <a:spcPts val="1375"/>
-              </a:lnSpc>
-              <a:buNone/>
-            </a:pPr>
-            <a:r>
-              <a:rPr lang="en-US" sz="1100" dirty="0">
-                <a:solidFill>
-                  <a:srgbClr val="1C2833"/>
-                </a:solidFill>
-                <a:latin typeface="Courier New" pitchFamily="34" charset="0"/>
-                <a:ea typeface="Courier New" pitchFamily="34" charset="-122"/>
-                <a:cs typeface="Courier New" pitchFamily="34" charset="-120"/>
-              </a:rPr>
-              <a:t>4536+</a:t>
-            </a:r>
-            <a:endParaRPr lang="en-US" sz="1100" dirty="0"/>
-          </a:p>
-        </p:txBody>
-      </p:sp>
-      <p:sp>
-        <p:nvSpPr>
-          <p:cNvPr id="11" name="Text 9"/>
-          <p:cNvSpPr/>
-          <p:nvPr/>
-        </p:nvSpPr>
-        <p:spPr>
-          <a:xfrm>
-            <a:off x="406301" y="2214116"/>
-            <a:ext cx="8498026" cy="213271"/>
-          </a:xfrm>
-          <a:prstGeom prst="rect">
-            <a:avLst/>
-          </a:prstGeom>
-          <a:noFill/>
-          <a:ln/>
-        </p:spPr>
-        <p:txBody>
-          <a:bodyPr wrap="square" lIns="0" tIns="0" rIns="0" bIns="0" rtlCol="0" anchor="t"/>
-          <a:lstStyle/>
-          <a:p>
-            <a:pPr algn="l" indent="0" marL="0">
-              <a:lnSpc>
-                <a:spcPts val="1680"/>
-              </a:lnSpc>
-              <a:spcBef>
-                <a:spcPts val="300"/>
-              </a:spcBef>
-              <a:spcAft>
-                <a:spcPts val="300"/>
-              </a:spcAft>
-              <a:buNone/>
-            </a:pPr>
-            <a:r>
-              <a:rPr lang="en-US" sz="1200" b="1" dirty="0">
+          <a:p>
+            <a:pPr algn="l" marL="342900" indent="-342900">
+              <a:lnSpc>
+                <a:spcPts val="1620"/>
+              </a:lnSpc>
+              <a:spcAft>
+                <a:spcPts val="300"/>
+              </a:spcAft>
+              <a:buSzPct val="100000"/>
+              <a:buChar char="•"/>
+            </a:pPr>
+            <a:r>
+              <a:rPr lang="en-US" sz="1200" dirty="0">
                 <a:solidFill>
                   <a:srgbClr val="1C2833"/>
                 </a:solidFill>
@@ -3925,53 +5692,7 @@
                 <a:ea typeface="Arial" pitchFamily="34" charset="-122"/>
                 <a:cs typeface="Arial" pitchFamily="34" charset="-120"/>
               </a:rPr>
-              <a:t>Units column:</a:t>
-            </a:r>
-            <a:pPr algn="l" indent="0" marL="0">
-              <a:lnSpc>
-                <a:spcPts val="1680"/>
-              </a:lnSpc>
-              <a:spcBef>
-                <a:spcPts val="300"/>
-              </a:spcBef>
-              <a:spcAft>
-                <a:spcPts val="300"/>
-              </a:spcAft>
-              <a:buNone/>
-            </a:pPr>
-            <a:r>
-              <a:rPr lang="en-US" sz="1200" dirty="0">
-                <a:solidFill>
-                  <a:srgbClr val="1C2833"/>
-                </a:solidFill>
-                <a:latin typeface="Arial" pitchFamily="34" charset="0"/>
-                <a:ea typeface="Arial" pitchFamily="34" charset="-122"/>
-                <a:cs typeface="Arial" pitchFamily="34" charset="-120"/>
-              </a:rPr>
-              <a:t> 8 + 7 + 2 + 6. – 0 → 8 → 15 (dot on 7, total 5) → 7 → 13 (dot on 6, total 3) → 3. - </a:t>
-            </a:r>
-            <a:pPr algn="l" indent="0" marL="0">
-              <a:lnSpc>
-                <a:spcPts val="1680"/>
-              </a:lnSpc>
-              <a:spcBef>
-                <a:spcPts val="300"/>
-              </a:spcBef>
-              <a:spcAft>
-                <a:spcPts val="300"/>
-              </a:spcAft>
-              <a:buNone/>
-            </a:pPr>
-            <a:r>
-              <a:rPr lang="en-US" sz="1200" b="1" dirty="0">
-                <a:solidFill>
-                  <a:srgbClr val="1C2833"/>
-                </a:solidFill>
-                <a:latin typeface="Arial" pitchFamily="34" charset="0"/>
-                <a:ea typeface="Arial" pitchFamily="34" charset="-122"/>
-                <a:cs typeface="Arial" pitchFamily="34" charset="-120"/>
-              </a:rPr>
-              <a:t>Write 3. Carry 2.</a:t>
+              <a:t>Hand back yesterday's formative. Don't review — students see their marks privately.</a:t>
             </a:r>
             <a:endParaRPr lang="en-US" sz="1200" dirty="0"/>
           </a:p>
@@ -3979,579 +5700,13 @@
       </p:sp>
       <p:sp>
         <p:nvSpPr>
-          <p:cNvPr id="12" name="Text 10"/>
-          <p:cNvSpPr/>
-          <p:nvPr/>
-        </p:nvSpPr>
-        <p:spPr>
-          <a:xfrm>
-            <a:off x="406301" y="2516237"/>
-            <a:ext cx="8331398" cy="1301353"/>
-          </a:xfrm>
-          <a:prstGeom prst="rect">
-            <a:avLst/>
-          </a:prstGeom>
-          <a:solidFill>
-            <a:srgbClr val="F4F8F9"/>
-          </a:solidFill>
-          <a:ln/>
-        </p:spPr>
-        <p:txBody>
-          <a:bodyPr wrap="square" rtlCol="0" anchor="ctr"/>
-          <a:lstStyle/>
-          <a:p>
-            <a:pPr indent="0" marL="0">
-              <a:buNone/>
-            </a:pPr>
-            <a:endParaRPr lang="en-US" dirty="0"/>
-          </a:p>
-        </p:txBody>
-      </p:sp>
-      <p:sp>
-        <p:nvSpPr>
-          <p:cNvPr id="13" name="Shape 11"/>
-          <p:cNvSpPr/>
-          <p:nvPr/>
-        </p:nvSpPr>
-        <p:spPr>
-          <a:xfrm>
-            <a:off x="430113" y="2516237"/>
-            <a:ext cx="0" cy="1301353"/>
-          </a:xfrm>
-          <a:prstGeom prst="line">
-            <a:avLst/>
-          </a:prstGeom>
-          <a:noFill/>
-          <a:ln w="47625">
-            <a:solidFill>
-              <a:srgbClr val="277884"/>
-            </a:solidFill>
-            <a:prstDash val="solid"/>
-          </a:ln>
-        </p:spPr>
-      </p:sp>
-      <p:sp>
-        <p:nvSpPr>
-          <p:cNvPr id="14" name="Text 12"/>
-          <p:cNvSpPr/>
-          <p:nvPr/>
-        </p:nvSpPr>
-        <p:spPr>
-          <a:xfrm>
-            <a:off x="631627" y="2643188"/>
-            <a:ext cx="8086939" cy="174575"/>
-          </a:xfrm>
-          <a:prstGeom prst="rect">
-            <a:avLst/>
-          </a:prstGeom>
-          <a:noFill/>
-          <a:ln/>
-        </p:spPr>
-        <p:txBody>
-          <a:bodyPr wrap="square" lIns="0" tIns="0" rIns="0" bIns="0" rtlCol="0" anchor="t"/>
-          <a:lstStyle/>
-          <a:p>
-            <a:pPr algn="l" indent="0" marL="0">
-              <a:lnSpc>
-                <a:spcPts val="1375"/>
-              </a:lnSpc>
-              <a:buNone/>
-            </a:pPr>
-            <a:r>
-              <a:rPr lang="en-US" sz="1100" dirty="0">
-                <a:solidFill>
-                  <a:srgbClr val="1C2833"/>
-                </a:solidFill>
-                <a:latin typeface="Courier New" pitchFamily="34" charset="0"/>
-                <a:ea typeface="Courier New" pitchFamily="34" charset="-122"/>
-                <a:cs typeface="Courier New" pitchFamily="34" charset="-120"/>
-              </a:rPr>
-              <a:t>· ·</a:t>
-            </a:r>
-            <a:endParaRPr lang="en-US" sz="1100" dirty="0"/>
-          </a:p>
-        </p:txBody>
-      </p:sp>
-      <p:sp>
-        <p:nvSpPr>
-          <p:cNvPr id="15" name="Text 13"/>
-          <p:cNvSpPr/>
-          <p:nvPr/>
-        </p:nvSpPr>
-        <p:spPr>
-          <a:xfrm>
-            <a:off x="631627" y="2817763"/>
-            <a:ext cx="8086939" cy="174575"/>
-          </a:xfrm>
-          <a:prstGeom prst="rect">
-            <a:avLst/>
-          </a:prstGeom>
-          <a:noFill/>
-          <a:ln/>
-        </p:spPr>
-        <p:txBody>
-          <a:bodyPr wrap="square" lIns="0" tIns="0" rIns="0" bIns="0" rtlCol="0" anchor="t"/>
-          <a:lstStyle/>
-          <a:p>
-            <a:pPr algn="l" indent="0" marL="0">
-              <a:lnSpc>
-                <a:spcPts val="1375"/>
-              </a:lnSpc>
-              <a:buNone/>
-            </a:pPr>
-            <a:r>
-              <a:rPr lang="en-US" sz="1100" dirty="0">
-                <a:solidFill>
-                  <a:srgbClr val="1C2833"/>
-                </a:solidFill>
-                <a:latin typeface="Courier New" pitchFamily="34" charset="0"/>
-                <a:ea typeface="Courier New" pitchFamily="34" charset="-122"/>
-                <a:cs typeface="Courier New" pitchFamily="34" charset="-120"/>
-              </a:rPr>
-              <a:t>5728</a:t>
-            </a:r>
-            <a:endParaRPr lang="en-US" sz="1100" dirty="0"/>
-          </a:p>
-        </p:txBody>
-      </p:sp>
-      <p:sp>
-        <p:nvSpPr>
-          <p:cNvPr id="16" name="Text 14"/>
-          <p:cNvSpPr/>
-          <p:nvPr/>
-        </p:nvSpPr>
-        <p:spPr>
-          <a:xfrm>
-            <a:off x="631627" y="2992338"/>
-            <a:ext cx="8086939" cy="174575"/>
-          </a:xfrm>
-          <a:prstGeom prst="rect">
-            <a:avLst/>
-          </a:prstGeom>
-          <a:noFill/>
-          <a:ln/>
-        </p:spPr>
-        <p:txBody>
-          <a:bodyPr wrap="square" lIns="0" tIns="0" rIns="0" bIns="0" rtlCol="0" anchor="t"/>
-          <a:lstStyle/>
-          <a:p>
-            <a:pPr algn="l" indent="0" marL="0">
-              <a:lnSpc>
-                <a:spcPts val="1375"/>
-              </a:lnSpc>
-              <a:buNone/>
-            </a:pPr>
-            <a:r>
-              <a:rPr lang="en-US" sz="1100" dirty="0">
-                <a:solidFill>
-                  <a:srgbClr val="1C2833"/>
-                </a:solidFill>
-                <a:latin typeface="Courier New" pitchFamily="34" charset="0"/>
-                <a:ea typeface="Courier New" pitchFamily="34" charset="-122"/>
-                <a:cs typeface="Courier New" pitchFamily="34" charset="-120"/>
-              </a:rPr>
-              <a:t>3417</a:t>
-            </a:r>
-            <a:endParaRPr lang="en-US" sz="1100" dirty="0"/>
-          </a:p>
-        </p:txBody>
-      </p:sp>
-      <p:sp>
-        <p:nvSpPr>
-          <p:cNvPr id="17" name="Text 15"/>
-          <p:cNvSpPr/>
-          <p:nvPr/>
-        </p:nvSpPr>
-        <p:spPr>
-          <a:xfrm>
-            <a:off x="631627" y="3166914"/>
-            <a:ext cx="8086939" cy="174575"/>
-          </a:xfrm>
-          <a:prstGeom prst="rect">
-            <a:avLst/>
-          </a:prstGeom>
-          <a:noFill/>
-          <a:ln/>
-        </p:spPr>
-        <p:txBody>
-          <a:bodyPr wrap="square" lIns="0" tIns="0" rIns="0" bIns="0" rtlCol="0" anchor="t"/>
-          <a:lstStyle/>
-          <a:p>
-            <a:pPr algn="l" indent="0" marL="0">
-              <a:lnSpc>
-                <a:spcPts val="1375"/>
-              </a:lnSpc>
-              <a:buNone/>
-            </a:pPr>
-            <a:r>
-              <a:rPr lang="en-US" sz="1100" dirty="0">
-                <a:solidFill>
-                  <a:srgbClr val="1C2833"/>
-                </a:solidFill>
-                <a:latin typeface="Courier New" pitchFamily="34" charset="0"/>
-                <a:ea typeface="Courier New" pitchFamily="34" charset="-122"/>
-                <a:cs typeface="Courier New" pitchFamily="34" charset="-120"/>
-              </a:rPr>
-              <a:t>6892</a:t>
-            </a:r>
-            <a:endParaRPr lang="en-US" sz="1100" dirty="0"/>
-          </a:p>
-        </p:txBody>
-      </p:sp>
-      <p:sp>
-        <p:nvSpPr>
-          <p:cNvPr id="18" name="Text 16"/>
-          <p:cNvSpPr/>
-          <p:nvPr/>
-        </p:nvSpPr>
-        <p:spPr>
-          <a:xfrm>
-            <a:off x="631627" y="3341489"/>
-            <a:ext cx="8086939" cy="174575"/>
-          </a:xfrm>
-          <a:prstGeom prst="rect">
-            <a:avLst/>
-          </a:prstGeom>
-          <a:noFill/>
-          <a:ln/>
-        </p:spPr>
-        <p:txBody>
-          <a:bodyPr wrap="square" lIns="0" tIns="0" rIns="0" bIns="0" rtlCol="0" anchor="t"/>
-          <a:lstStyle/>
-          <a:p>
-            <a:pPr algn="l" indent="0" marL="0">
-              <a:lnSpc>
-                <a:spcPts val="1375"/>
-              </a:lnSpc>
-              <a:buNone/>
-            </a:pPr>
-            <a:r>
-              <a:rPr lang="en-US" sz="1100" dirty="0">
-                <a:solidFill>
-                  <a:srgbClr val="1C2833"/>
-                </a:solidFill>
-                <a:latin typeface="Courier New" pitchFamily="34" charset="0"/>
-                <a:ea typeface="Courier New" pitchFamily="34" charset="-122"/>
-                <a:cs typeface="Courier New" pitchFamily="34" charset="-120"/>
-              </a:rPr>
-              <a:t>4536+</a:t>
-            </a:r>
-            <a:endParaRPr lang="en-US" sz="1100" dirty="0"/>
-          </a:p>
-        </p:txBody>
-      </p:sp>
-      <p:sp>
-        <p:nvSpPr>
-          <p:cNvPr id="19" name="Text 17"/>
-          <p:cNvSpPr/>
-          <p:nvPr/>
-        </p:nvSpPr>
-        <p:spPr>
-          <a:xfrm>
-            <a:off x="631627" y="3516064"/>
-            <a:ext cx="8086939" cy="174575"/>
-          </a:xfrm>
-          <a:prstGeom prst="rect">
-            <a:avLst/>
-          </a:prstGeom>
-          <a:noFill/>
-          <a:ln/>
-        </p:spPr>
-        <p:txBody>
-          <a:bodyPr wrap="square" lIns="0" tIns="0" rIns="0" bIns="0" rtlCol="0" anchor="t"/>
-          <a:lstStyle/>
-          <a:p>
-            <a:pPr algn="l" indent="0" marL="0">
-              <a:lnSpc>
-                <a:spcPts val="1375"/>
-              </a:lnSpc>
-              <a:buNone/>
-            </a:pPr>
-            <a:r>
-              <a:rPr lang="en-US" sz="1100" dirty="0">
-                <a:solidFill>
-                  <a:srgbClr val="1C2833"/>
-                </a:solidFill>
-                <a:latin typeface="Courier New" pitchFamily="34" charset="0"/>
-                <a:ea typeface="Courier New" pitchFamily="34" charset="-122"/>
-                <a:cs typeface="Courier New" pitchFamily="34" charset="-120"/>
-              </a:rPr>
-              <a:t>3 [carry 2]</a:t>
-            </a:r>
-            <a:endParaRPr lang="en-US" sz="1100" dirty="0"/>
-          </a:p>
-        </p:txBody>
-      </p:sp>
-      <p:sp>
-        <p:nvSpPr>
-          <p:cNvPr id="20" name="Text 18"/>
-          <p:cNvSpPr/>
-          <p:nvPr/>
-        </p:nvSpPr>
-        <p:spPr>
-          <a:xfrm>
-            <a:off x="406301" y="3906441"/>
-            <a:ext cx="8498026" cy="426541"/>
-          </a:xfrm>
-          <a:prstGeom prst="rect">
-            <a:avLst/>
-          </a:prstGeom>
-          <a:noFill/>
-          <a:ln/>
-        </p:spPr>
-        <p:txBody>
-          <a:bodyPr wrap="square" lIns="0" tIns="0" rIns="0" bIns="0" rtlCol="0" anchor="t"/>
-          <a:lstStyle/>
-          <a:p>
-            <a:pPr algn="l" indent="0" marL="0">
-              <a:lnSpc>
-                <a:spcPts val="1680"/>
-              </a:lnSpc>
-              <a:spcBef>
-                <a:spcPts val="300"/>
-              </a:spcBef>
-              <a:spcAft>
-                <a:spcPts val="300"/>
-              </a:spcAft>
-              <a:buNone/>
-            </a:pPr>
-            <a:r>
-              <a:rPr lang="en-US" sz="1200" b="1" dirty="0">
-                <a:solidFill>
-                  <a:srgbClr val="1C2833"/>
-                </a:solidFill>
-                <a:latin typeface="Arial" pitchFamily="34" charset="0"/>
-                <a:ea typeface="Arial" pitchFamily="34" charset="-122"/>
-                <a:cs typeface="Arial" pitchFamily="34" charset="-120"/>
-              </a:rPr>
-              <a:t>Tens column:</a:t>
-            </a:r>
-            <a:pPr algn="l" indent="0" marL="0">
-              <a:lnSpc>
-                <a:spcPts val="1680"/>
-              </a:lnSpc>
-              <a:spcBef>
-                <a:spcPts val="300"/>
-              </a:spcBef>
-              <a:spcAft>
-                <a:spcPts val="300"/>
-              </a:spcAft>
-              <a:buNone/>
-            </a:pPr>
-            <a:r>
-              <a:rPr lang="en-US" sz="1200" dirty="0">
-                <a:solidFill>
-                  <a:srgbClr val="1C2833"/>
-                </a:solidFill>
-                <a:latin typeface="Arial" pitchFamily="34" charset="0"/>
-                <a:ea typeface="Arial" pitchFamily="34" charset="-122"/>
-                <a:cs typeface="Arial" pitchFamily="34" charset="-120"/>
-              </a:rPr>
-              <a:t> 2 + 1 + 9 + 3 + carry-2. – Include the carry IN the column (write it as a small digit at the top of the column, or hold it in your head). – 0 → 2 → 3 → 12 (dot on 9, total 2) → 5 → 7 (the carry). - </a:t>
-            </a:r>
-            <a:pPr algn="l" indent="0" marL="0">
-              <a:lnSpc>
-                <a:spcPts val="1680"/>
-              </a:lnSpc>
-              <a:spcBef>
-                <a:spcPts val="300"/>
-              </a:spcBef>
-              <a:spcAft>
-                <a:spcPts val="300"/>
-              </a:spcAft>
-              <a:buNone/>
-            </a:pPr>
-            <a:r>
-              <a:rPr lang="en-US" sz="1200" b="1" dirty="0">
-                <a:solidFill>
-                  <a:srgbClr val="1C2833"/>
-                </a:solidFill>
-                <a:latin typeface="Arial" pitchFamily="34" charset="0"/>
-                <a:ea typeface="Arial" pitchFamily="34" charset="-122"/>
-                <a:cs typeface="Arial" pitchFamily="34" charset="-120"/>
-              </a:rPr>
-              <a:t>Write 7. Carry 1.</a:t>
-            </a:r>
-            <a:endParaRPr lang="en-US" sz="1200" dirty="0"/>
-          </a:p>
-        </p:txBody>
-      </p:sp>
-      <p:sp>
-        <p:nvSpPr>
-          <p:cNvPr id="21" name="Text 19"/>
-          <p:cNvSpPr/>
-          <p:nvPr/>
-        </p:nvSpPr>
-        <p:spPr>
-          <a:xfrm>
-            <a:off x="406301" y="4409182"/>
-            <a:ext cx="8498026" cy="213271"/>
-          </a:xfrm>
-          <a:prstGeom prst="rect">
-            <a:avLst/>
-          </a:prstGeom>
-          <a:noFill/>
-          <a:ln/>
-        </p:spPr>
-        <p:txBody>
-          <a:bodyPr wrap="square" lIns="0" tIns="0" rIns="0" bIns="0" rtlCol="0" anchor="t"/>
-          <a:lstStyle/>
-          <a:p>
-            <a:pPr algn="l" indent="0" marL="0">
-              <a:lnSpc>
-                <a:spcPts val="1680"/>
-              </a:lnSpc>
-              <a:spcBef>
-                <a:spcPts val="300"/>
-              </a:spcBef>
-              <a:spcAft>
-                <a:spcPts val="300"/>
-              </a:spcAft>
-              <a:buNone/>
-            </a:pPr>
-            <a:r>
-              <a:rPr lang="en-US" sz="1200" dirty="0">
-                <a:solidFill>
-                  <a:srgbClr val="1C2833"/>
-                </a:solidFill>
-                <a:latin typeface="Arial" pitchFamily="34" charset="0"/>
-                <a:ea typeface="Arial" pitchFamily="34" charset="-122"/>
-                <a:cs typeface="Arial" pitchFamily="34" charset="-120"/>
-              </a:rPr>
-              <a:t>Continue.</a:t>
-            </a:r>
-            <a:endParaRPr lang="en-US" sz="1200" dirty="0"/>
-          </a:p>
-        </p:txBody>
-      </p:sp>
-      <p:sp>
-        <p:nvSpPr>
-          <p:cNvPr id="22" name="Text 20"/>
-          <p:cNvSpPr/>
-          <p:nvPr/>
-        </p:nvSpPr>
-        <p:spPr>
-          <a:xfrm>
-            <a:off x="406301" y="4698653"/>
-            <a:ext cx="8498026" cy="213271"/>
-          </a:xfrm>
-          <a:prstGeom prst="rect">
-            <a:avLst/>
-          </a:prstGeom>
-          <a:noFill/>
-          <a:ln/>
-        </p:spPr>
-        <p:txBody>
-          <a:bodyPr wrap="square" lIns="0" tIns="0" rIns="0" bIns="0" rtlCol="0" anchor="t"/>
-          <a:lstStyle/>
-          <a:p>
-            <a:pPr algn="l" indent="0" marL="0">
-              <a:lnSpc>
-                <a:spcPts val="1680"/>
-              </a:lnSpc>
-              <a:spcBef>
-                <a:spcPts val="300"/>
-              </a:spcBef>
-              <a:spcAft>
-                <a:spcPts val="300"/>
-              </a:spcAft>
-              <a:buNone/>
-            </a:pPr>
-            <a:r>
-              <a:rPr lang="en-US" sz="1200" dirty="0">
-                <a:solidFill>
-                  <a:srgbClr val="1C2833"/>
-                </a:solidFill>
-                <a:latin typeface="Arial" pitchFamily="34" charset="0"/>
-                <a:ea typeface="Arial" pitchFamily="34" charset="-122"/>
-                <a:cs typeface="Arial" pitchFamily="34" charset="-120"/>
-              </a:rPr>
-              <a:t>Final result: </a:t>
-            </a:r>
-            <a:pPr algn="l" indent="0" marL="0">
-              <a:lnSpc>
-                <a:spcPts val="1680"/>
-              </a:lnSpc>
-              <a:spcBef>
-                <a:spcPts val="300"/>
-              </a:spcBef>
-              <a:spcAft>
-                <a:spcPts val="300"/>
-              </a:spcAft>
-              <a:buNone/>
-            </a:pPr>
-            <a:r>
-              <a:rPr lang="en-US" sz="1200" b="1" dirty="0">
-                <a:solidFill>
-                  <a:srgbClr val="1C2833"/>
-                </a:solidFill>
-                <a:latin typeface="Arial" pitchFamily="34" charset="0"/>
-                <a:ea typeface="Arial" pitchFamily="34" charset="-122"/>
-                <a:cs typeface="Arial" pitchFamily="34" charset="-120"/>
-              </a:rPr>
-              <a:t>20573</a:t>
-            </a:r>
-            <a:endParaRPr lang="en-US" sz="1200" dirty="0"/>
-          </a:p>
-        </p:txBody>
-      </p:sp>
-      <p:sp>
-        <p:nvSpPr>
-          <p:cNvPr id="23" name="Text 21"/>
-          <p:cNvSpPr/>
-          <p:nvPr/>
-        </p:nvSpPr>
-        <p:spPr>
-          <a:xfrm>
-            <a:off x="406301" y="4988123"/>
-            <a:ext cx="8498026" cy="213271"/>
-          </a:xfrm>
-          <a:prstGeom prst="rect">
-            <a:avLst/>
-          </a:prstGeom>
-          <a:noFill/>
-          <a:ln/>
-        </p:spPr>
-        <p:txBody>
-          <a:bodyPr wrap="square" lIns="0" tIns="0" rIns="0" bIns="0" rtlCol="0" anchor="t"/>
-          <a:lstStyle/>
-          <a:p>
-            <a:pPr algn="l" indent="0" marL="0">
-              <a:lnSpc>
-                <a:spcPts val="1680"/>
-              </a:lnSpc>
-              <a:spcBef>
-                <a:spcPts val="300"/>
-              </a:spcBef>
-              <a:spcAft>
-                <a:spcPts val="300"/>
-              </a:spcAft>
-              <a:buNone/>
-            </a:pPr>
-            <a:r>
-              <a:rPr lang="en-US" sz="1200" dirty="0">
-                <a:solidFill>
-                  <a:srgbClr val="1C2833"/>
-                </a:solidFill>
-                <a:latin typeface="Arial" pitchFamily="34" charset="0"/>
-                <a:ea typeface="Arial" pitchFamily="34" charset="-122"/>
-                <a:cs typeface="Arial" pitchFamily="34" charset="-120"/>
-              </a:rPr>
-              <a:t>– Verify with calculator or standard algorithm.</a:t>
-            </a:r>
-            <a:endParaRPr lang="en-US" sz="1200" dirty="0"/>
-          </a:p>
-        </p:txBody>
-      </p:sp>
-      <p:sp>
-        <p:nvSpPr>
-          <p:cNvPr id="24" name="Text 22"/>
-          <p:cNvSpPr/>
-          <p:nvPr/>
-        </p:nvSpPr>
-        <p:spPr>
-          <a:xfrm>
-            <a:off x="406301" y="5353794"/>
+          <p:cNvPr id="5" name="Text 3"/>
+          <p:cNvSpPr/>
+          <p:nvPr/>
+        </p:nvSpPr>
+        <p:spPr>
+          <a:xfrm>
+            <a:off x="406301" y="4434929"/>
             <a:ext cx="8498026" cy="213271"/>
           </a:xfrm>
           <a:prstGeom prst="rect">
@@ -4695,7 +5850,7 @@
                 <a:ea typeface="Georgia" pitchFamily="34" charset="-122"/>
                 <a:cs typeface="Georgia" pitchFamily="34" charset="-120"/>
               </a:rPr>
-              <a:t>Activity (25 min) — Drill</a:t>
+              <a:t>Core (10 min) — The carry handoff</a:t>
             </a:r>
             <a:endParaRPr lang="en-US" sz="1800" dirty="0"/>
           </a:p>
@@ -4709,8 +5864,8 @@
         </p:nvSpPr>
         <p:spPr>
           <a:xfrm>
-            <a:off x="406301" y="870942"/>
-            <a:ext cx="8498026" cy="222796"/>
+            <a:off x="634901" y="883593"/>
+            <a:ext cx="8102798" cy="281880"/>
           </a:xfrm>
           <a:prstGeom prst="rect">
             <a:avLst/>
@@ -4722,17 +5877,15 @@
           <a:bodyPr wrap="square" lIns="0" tIns="0" rIns="0" bIns="0" rtlCol="0" anchor="t"/>
           <a:lstStyle/>
           <a:p>
-            <a:pPr algn="l" indent="0" marL="0">
-              <a:lnSpc>
-                <a:spcPts val="1680"/>
-              </a:lnSpc>
-              <a:spcBef>
-                <a:spcPts val="300"/>
-              </a:spcBef>
-              <a:spcAft>
-                <a:spcPts val="300"/>
-              </a:spcAft>
-              <a:buNone/>
+            <a:pPr algn="l" marL="342900" indent="-342900">
+              <a:lnSpc>
+                <a:spcPts val="1620"/>
+              </a:lnSpc>
+              <a:spcAft>
+                <a:spcPts val="300"/>
+              </a:spcAft>
+              <a:buSzPct val="100000"/>
+              <a:buChar char="•"/>
             </a:pPr>
             <a:r>
               <a:rPr lang="en-US" sz="1200" dirty="0">
@@ -4743,68 +5896,159 @@
                 <a:ea typeface="Arial" pitchFamily="34" charset="-122"/>
                 <a:cs typeface="Arial" pitchFamily="34" charset="-120"/>
               </a:rPr>
-              <a:t>Follow </a:t>
-            </a:r>
+              <a:t>Demonstrate on the board:</a:t>
+            </a:r>
+            <a:endParaRPr lang="en-US" sz="1200" dirty="0"/>
+          </a:p>
+        </p:txBody>
+      </p:sp>
+      <p:sp>
+        <p:nvSpPr>
+          <p:cNvPr id="5" name="Text 3"/>
+          <p:cNvSpPr/>
+          <p:nvPr/>
+        </p:nvSpPr>
+        <p:spPr>
+          <a:xfrm>
+            <a:off x="406301" y="1266974"/>
+            <a:ext cx="8331398" cy="952202"/>
+          </a:xfrm>
+          <a:prstGeom prst="rect">
+            <a:avLst/>
+          </a:prstGeom>
+          <a:solidFill>
+            <a:srgbClr val="F4F8F9"/>
+          </a:solidFill>
+          <a:ln/>
+        </p:spPr>
+        <p:txBody>
+          <a:bodyPr wrap="square" rtlCol="0" anchor="ctr"/>
+          <a:lstStyle/>
+          <a:p>
+            <a:pPr indent="0" marL="0">
+              <a:buNone/>
+            </a:pPr>
+            <a:endParaRPr lang="en-US" dirty="0"/>
+          </a:p>
+        </p:txBody>
+      </p:sp>
+      <p:sp>
+        <p:nvSpPr>
+          <p:cNvPr id="6" name="Shape 4"/>
+          <p:cNvSpPr/>
+          <p:nvPr/>
+        </p:nvSpPr>
+        <p:spPr>
+          <a:xfrm>
+            <a:off x="430113" y="1266974"/>
+            <a:ext cx="0" cy="952202"/>
+          </a:xfrm>
+          <a:prstGeom prst="line">
+            <a:avLst/>
+          </a:prstGeom>
+          <a:noFill/>
+          <a:ln w="47625">
+            <a:solidFill>
+              <a:srgbClr val="277884"/>
+            </a:solidFill>
+            <a:prstDash val="solid"/>
+          </a:ln>
+        </p:spPr>
+      </p:sp>
+      <p:sp>
+        <p:nvSpPr>
+          <p:cNvPr id="7" name="Text 5"/>
+          <p:cNvSpPr/>
+          <p:nvPr/>
+        </p:nvSpPr>
+        <p:spPr>
+          <a:xfrm>
+            <a:off x="631627" y="1393924"/>
+            <a:ext cx="8086939" cy="174575"/>
+          </a:xfrm>
+          <a:prstGeom prst="rect">
+            <a:avLst/>
+          </a:prstGeom>
+          <a:noFill/>
+          <a:ln/>
+        </p:spPr>
+        <p:txBody>
+          <a:bodyPr wrap="square" lIns="0" tIns="0" rIns="0" bIns="0" rtlCol="0" anchor="t"/>
+          <a:lstStyle/>
+          <a:p>
             <a:pPr algn="l" indent="0" marL="0">
               <a:lnSpc>
-                <a:spcPts val="1680"/>
-              </a:lnSpc>
-              <a:spcBef>
-                <a:spcPts val="300"/>
-              </a:spcBef>
-              <a:spcAft>
-                <a:spcPts val="300"/>
-              </a:spcAft>
-              <a:buNone/>
-            </a:pPr>
-            <a:r>
-              <a:rPr lang="en-US" sz="1200" dirty="0">
-                <a:solidFill>
-                  <a:srgbClr val="1C2833"/>
-                </a:solidFill>
-                <a:latin typeface="Arial" pitchFamily="34" charset="0"/>
-                <a:ea typeface="Arial" pitchFamily="34" charset="-122"/>
-                <a:cs typeface="Arial" pitchFamily="34" charset="-120"/>
-              </a:rPr>
-              <a:t>activities/activity-01-column-drill.md</a:t>
-            </a:r>
+                <a:spcPts val="1375"/>
+              </a:lnSpc>
+              <a:buNone/>
+            </a:pPr>
+            <a:r>
+              <a:rPr lang="en-US" sz="1100" dirty="0">
+                <a:solidFill>
+                  <a:srgbClr val="1C2833"/>
+                </a:solidFill>
+                <a:latin typeface="Courier New" pitchFamily="34" charset="0"/>
+                <a:ea typeface="Courier New" pitchFamily="34" charset="-122"/>
+                <a:cs typeface="Courier New" pitchFamily="34" charset="-120"/>
+              </a:rPr>
+              <a:t>5728</a:t>
+            </a:r>
+            <a:endParaRPr lang="en-US" sz="1100" dirty="0"/>
+          </a:p>
+        </p:txBody>
+      </p:sp>
+      <p:sp>
+        <p:nvSpPr>
+          <p:cNvPr id="8" name="Text 6"/>
+          <p:cNvSpPr/>
+          <p:nvPr/>
+        </p:nvSpPr>
+        <p:spPr>
+          <a:xfrm>
+            <a:off x="631627" y="1568500"/>
+            <a:ext cx="8086939" cy="174575"/>
+          </a:xfrm>
+          <a:prstGeom prst="rect">
+            <a:avLst/>
+          </a:prstGeom>
+          <a:noFill/>
+          <a:ln/>
+        </p:spPr>
+        <p:txBody>
+          <a:bodyPr wrap="square" lIns="0" tIns="0" rIns="0" bIns="0" rtlCol="0" anchor="t"/>
+          <a:lstStyle/>
+          <a:p>
             <a:pPr algn="l" indent="0" marL="0">
               <a:lnSpc>
-                <a:spcPts val="1680"/>
-              </a:lnSpc>
-              <a:spcBef>
-                <a:spcPts val="300"/>
-              </a:spcBef>
-              <a:spcAft>
-                <a:spcPts val="300"/>
-              </a:spcAft>
-              <a:buNone/>
-            </a:pPr>
-            <a:r>
-              <a:rPr lang="en-US" sz="1200" dirty="0">
-                <a:solidFill>
-                  <a:srgbClr val="1C2833"/>
-                </a:solidFill>
-                <a:latin typeface="Arial" pitchFamily="34" charset="0"/>
-                <a:ea typeface="Arial" pitchFamily="34" charset="-122"/>
-                <a:cs typeface="Arial" pitchFamily="34" charset="-120"/>
-              </a:rPr>
-              <a:t>. Brief:</a:t>
-            </a:r>
-            <a:endParaRPr lang="en-US" sz="1200" dirty="0"/>
-          </a:p>
-        </p:txBody>
-      </p:sp>
-      <p:sp>
-        <p:nvSpPr>
-          <p:cNvPr id="5" name="Text 3"/>
-          <p:cNvSpPr/>
-          <p:nvPr/>
-        </p:nvSpPr>
-        <p:spPr>
-          <a:xfrm>
-            <a:off x="406301" y="1169938"/>
-            <a:ext cx="8498026" cy="639812"/>
+                <a:spcPts val="1375"/>
+              </a:lnSpc>
+              <a:buNone/>
+            </a:pPr>
+            <a:r>
+              <a:rPr lang="en-US" sz="1100" dirty="0">
+                <a:solidFill>
+                  <a:srgbClr val="1C2833"/>
+                </a:solidFill>
+                <a:latin typeface="Courier New" pitchFamily="34" charset="0"/>
+                <a:ea typeface="Courier New" pitchFamily="34" charset="-122"/>
+                <a:cs typeface="Courier New" pitchFamily="34" charset="-120"/>
+              </a:rPr>
+              <a:t>3417</a:t>
+            </a:r>
+            <a:endParaRPr lang="en-US" sz="1100" dirty="0"/>
+          </a:p>
+        </p:txBody>
+      </p:sp>
+      <p:sp>
+        <p:nvSpPr>
+          <p:cNvPr id="9" name="Text 7"/>
+          <p:cNvSpPr/>
+          <p:nvPr/>
+        </p:nvSpPr>
+        <p:spPr>
+          <a:xfrm>
+            <a:off x="631627" y="1743075"/>
+            <a:ext cx="8086939" cy="174575"/>
           </a:xfrm>
           <a:prstGeom prst="rect">
             <a:avLst/>
@@ -4818,34 +6062,70 @@
           <a:p>
             <a:pPr algn="l" indent="0" marL="0">
               <a:lnSpc>
-                <a:spcPts val="1680"/>
-              </a:lnSpc>
-              <a:spcBef>
-                <a:spcPts val="300"/>
-              </a:spcBef>
-              <a:spcAft>
-                <a:spcPts val="300"/>
-              </a:spcAft>
-              <a:buNone/>
-            </a:pPr>
-            <a:r>
-              <a:rPr lang="en-US" sz="1200" dirty="0">
-                <a:solidFill>
-                  <a:srgbClr val="1C2833"/>
-                </a:solidFill>
-                <a:latin typeface="Arial" pitchFamily="34" charset="0"/>
-                <a:ea typeface="Arial" pitchFamily="34" charset="-122"/>
-                <a:cs typeface="Arial" pitchFamily="34" charset="-120"/>
-              </a:rPr>
-              <a:t>– 8 multi-column problems, individual work first (8 min). – Then paired check (10 min): partners trade sheets; one reads problem aloud while the other re-solves on a fresh sheet; compare results. – Final 7 min: any 3 problems the student got wrong, redo silently.</a:t>
-            </a:r>
-            <a:endParaRPr lang="en-US" sz="1200" dirty="0"/>
-          </a:p>
-        </p:txBody>
-      </p:sp>
-      <p:sp>
-        <p:nvSpPr>
-          <p:cNvPr id="6" name="Text 4"/>
+                <a:spcPts val="1375"/>
+              </a:lnSpc>
+              <a:buNone/>
+            </a:pPr>
+            <a:r>
+              <a:rPr lang="en-US" sz="1100" dirty="0">
+                <a:solidFill>
+                  <a:srgbClr val="1C2833"/>
+                </a:solidFill>
+                <a:latin typeface="Courier New" pitchFamily="34" charset="0"/>
+                <a:ea typeface="Courier New" pitchFamily="34" charset="-122"/>
+                <a:cs typeface="Courier New" pitchFamily="34" charset="-120"/>
+              </a:rPr>
+              <a:t>6892</a:t>
+            </a:r>
+            <a:endParaRPr lang="en-US" sz="1100" dirty="0"/>
+          </a:p>
+        </p:txBody>
+      </p:sp>
+      <p:sp>
+        <p:nvSpPr>
+          <p:cNvPr id="10" name="Text 8"/>
+          <p:cNvSpPr/>
+          <p:nvPr/>
+        </p:nvSpPr>
+        <p:spPr>
+          <a:xfrm>
+            <a:off x="631627" y="1917650"/>
+            <a:ext cx="8086939" cy="174575"/>
+          </a:xfrm>
+          <a:prstGeom prst="rect">
+            <a:avLst/>
+          </a:prstGeom>
+          <a:noFill/>
+          <a:ln/>
+        </p:spPr>
+        <p:txBody>
+          <a:bodyPr wrap="square" lIns="0" tIns="0" rIns="0" bIns="0" rtlCol="0" anchor="t"/>
+          <a:lstStyle/>
+          <a:p>
+            <a:pPr algn="l" indent="0" marL="0">
+              <a:lnSpc>
+                <a:spcPts val="1375"/>
+              </a:lnSpc>
+              <a:buNone/>
+            </a:pPr>
+            <a:r>
+              <a:rPr lang="en-US" sz="1100" dirty="0">
+                <a:solidFill>
+                  <a:srgbClr val="1C2833"/>
+                </a:solidFill>
+                <a:latin typeface="Courier New" pitchFamily="34" charset="0"/>
+                <a:ea typeface="Courier New" pitchFamily="34" charset="-122"/>
+                <a:cs typeface="Courier New" pitchFamily="34" charset="-120"/>
+              </a:rPr>
+              <a:t>4536+</a:t>
+            </a:r>
+            <a:endParaRPr lang="en-US" sz="1100" dirty="0"/>
+          </a:p>
+        </p:txBody>
+      </p:sp>
+      <p:sp>
+        <p:nvSpPr>
+          <p:cNvPr id="11" name="Text 9"/>
           <p:cNvSpPr/>
           <p:nvPr/>
         </p:nvSpPr>
@@ -4995,7 +6275,7 @@
                 <a:ea typeface="Georgia" pitchFamily="34" charset="-122"/>
                 <a:cs typeface="Georgia" pitchFamily="34" charset="-120"/>
               </a:rPr>
-              <a:t>Wrap-up (5 min)</a:t>
+              <a:t>Core (10 min) — The carry handoff (cont.)</a:t>
             </a:r>
             <a:endParaRPr lang="en-US" sz="1800" dirty="0"/>
           </a:p>
@@ -5010,7 +6290,7 @@
         <p:spPr>
           <a:xfrm>
             <a:off x="406301" y="870942"/>
-            <a:ext cx="8498026" cy="426541"/>
+            <a:ext cx="8498026" cy="213271"/>
           </a:xfrm>
           <a:prstGeom prst="rect">
             <a:avLst/>
@@ -5035,7 +6315,7 @@
               <a:buNone/>
             </a:pPr>
             <a:r>
-              <a:rPr lang="en-US" sz="1200" dirty="0">
+              <a:rPr lang="en-US" sz="1200" b="1" dirty="0">
                 <a:solidFill>
                   <a:srgbClr val="1C2833"/>
                 </a:solidFill>
@@ -5043,7 +6323,30 @@
                 <a:ea typeface="Arial" pitchFamily="34" charset="-122"/>
                 <a:cs typeface="Arial" pitchFamily="34" charset="-120"/>
               </a:rPr>
-              <a:t>– Show of hands: who finished all 8 in 8 minutes? Who needs more time? (Don't shame either group — Day 5 is the retest.) – Preview Day 5: timed re-test of Day 1's baseline problem.</a:t>
+              <a:t>Units column:</a:t>
+            </a:r>
+            <a:pPr algn="l" indent="0" marL="0">
+              <a:lnSpc>
+                <a:spcPts val="1680"/>
+              </a:lnSpc>
+              <a:spcBef>
+                <a:spcPts val="300"/>
+              </a:spcBef>
+              <a:spcAft>
+                <a:spcPts val="300"/>
+              </a:spcAft>
+              <a:buNone/>
+            </a:pPr>
+            <a:r>
+              <a:rPr lang="en-US" sz="1200" dirty="0">
+                <a:solidFill>
+                  <a:srgbClr val="1C2833"/>
+                </a:solidFill>
+                <a:latin typeface="Arial" pitchFamily="34" charset="0"/>
+                <a:ea typeface="Arial" pitchFamily="34" charset="-122"/>
+                <a:cs typeface="Arial" pitchFamily="34" charset="-120"/>
+              </a:rPr>
+              <a:t> 8 + 7 + 2 + 6.</a:t>
             </a:r>
             <a:endParaRPr lang="en-US" sz="1200" dirty="0"/>
           </a:p>
@@ -5052,6 +6355,76 @@
       <p:sp>
         <p:nvSpPr>
           <p:cNvPr id="5" name="Text 3"/>
+          <p:cNvSpPr/>
+          <p:nvPr/>
+        </p:nvSpPr>
+        <p:spPr>
+          <a:xfrm>
+            <a:off x="634901" y="1173063"/>
+            <a:ext cx="8102798" cy="525661"/>
+          </a:xfrm>
+          <a:prstGeom prst="rect">
+            <a:avLst/>
+          </a:prstGeom>
+          <a:noFill/>
+          <a:ln/>
+        </p:spPr>
+        <p:txBody>
+          <a:bodyPr wrap="square" lIns="0" tIns="0" rIns="0" bIns="0" rtlCol="0" anchor="t"/>
+          <a:lstStyle/>
+          <a:p>
+            <a:pPr algn="l" marL="342900" indent="-342900">
+              <a:lnSpc>
+                <a:spcPts val="1620"/>
+              </a:lnSpc>
+              <a:spcAft>
+                <a:spcPts val="300"/>
+              </a:spcAft>
+              <a:buSzPct val="100000"/>
+              <a:buChar char="•"/>
+            </a:pPr>
+            <a:r>
+              <a:rPr lang="en-US" sz="1200" dirty="0">
+                <a:solidFill>
+                  <a:srgbClr val="1C2833"/>
+                </a:solidFill>
+                <a:latin typeface="Arial" pitchFamily="34" charset="0"/>
+                <a:ea typeface="Arial" pitchFamily="34" charset="-122"/>
+                <a:cs typeface="Arial" pitchFamily="34" charset="-120"/>
+              </a:rPr>
+              <a:t>0 → 8 → 15 (dot on 7, total 5) → 7 → 13 (dot on 6, total 3) → 3.</a:t>
+            </a:r>
+            <a:endParaRPr lang="en-US" sz="1200" dirty="0"/>
+          </a:p>
+          <a:p>
+            <a:pPr algn="l" marL="342900" indent="-342900">
+              <a:lnSpc>
+                <a:spcPts val="1620"/>
+              </a:lnSpc>
+              <a:spcAft>
+                <a:spcPts val="300"/>
+              </a:spcAft>
+              <a:buSzPct val="100000"/>
+              <a:buChar char="•"/>
+            </a:pPr>
+            <a:r>
+              <a:rPr lang="en-US" sz="1200" b="1" dirty="0">
+                <a:solidFill>
+                  <a:srgbClr val="1C2833"/>
+                </a:solidFill>
+                <a:latin typeface="Arial" pitchFamily="34" charset="0"/>
+                <a:ea typeface="Arial" pitchFamily="34" charset="-122"/>
+                <a:cs typeface="Arial" pitchFamily="34" charset="-120"/>
+              </a:rPr>
+              <a:t>Write 3. Carry 2.</a:t>
+            </a:r>
+            <a:endParaRPr lang="en-US" sz="1200" dirty="0"/>
+          </a:p>
+        </p:txBody>
+      </p:sp>
+      <p:sp>
+        <p:nvSpPr>
+          <p:cNvPr id="6" name="Text 4"/>
           <p:cNvSpPr/>
           <p:nvPr/>
         </p:nvSpPr>
@@ -5201,7 +6574,7 @@
                 <a:ea typeface="Georgia" pitchFamily="34" charset="-122"/>
                 <a:cs typeface="Georgia" pitchFamily="34" charset="-120"/>
               </a:rPr>
-              <a:t>Student-facing content</a:t>
+              <a:t>Core (10 min) — The carry handoff (cont.)</a:t>
             </a:r>
             <a:endParaRPr lang="en-US" sz="1800" dirty="0"/>
           </a:p>
@@ -5216,7 +6589,7 @@
         <p:spPr>
           <a:xfrm>
             <a:off x="406301" y="883593"/>
-            <a:ext cx="8331398" cy="1650206"/>
+            <a:ext cx="8331398" cy="1301353"/>
           </a:xfrm>
           <a:prstGeom prst="rect">
             <a:avLst/>
@@ -5245,16 +6618,16 @@
         </p:nvSpPr>
         <p:spPr>
           <a:xfrm>
-            <a:off x="434876" y="883593"/>
-            <a:ext cx="0" cy="1650206"/>
+            <a:off x="430113" y="883593"/>
+            <a:ext cx="0" cy="1301353"/>
           </a:xfrm>
           <a:prstGeom prst="line">
             <a:avLst/>
           </a:prstGeom>
           <a:noFill/>
-          <a:ln w="57150">
+          <a:ln w="47625">
             <a:solidFill>
-              <a:srgbClr val="FE4447"/>
+              <a:srgbClr val="277884"/>
             </a:solidFill>
             <a:prstDash val="solid"/>
           </a:ln>
@@ -5268,8 +6641,8 @@
         </p:nvSpPr>
         <p:spPr>
           <a:xfrm>
-            <a:off x="692051" y="1074093"/>
-            <a:ext cx="7973389" cy="230981"/>
+            <a:off x="631627" y="1010543"/>
+            <a:ext cx="8086939" cy="174575"/>
           </a:xfrm>
           <a:prstGeom prst="rect">
             <a:avLst/>
@@ -5283,28 +6656,22 @@
           <a:p>
             <a:pPr algn="l" indent="0" marL="0">
               <a:lnSpc>
-                <a:spcPts val="1820"/>
-              </a:lnSpc>
-              <a:spcBef>
-                <a:spcPts val="300"/>
-              </a:spcBef>
-              <a:spcAft>
-                <a:spcPts val="300"/>
-              </a:spcAft>
-              <a:buNone/>
-            </a:pPr>
-            <a:r>
-              <a:rPr lang="en-US" sz="1300" b="1" i="1" dirty="0">
-                <a:solidFill>
-                  <a:srgbClr val="1C2833"/>
-                </a:solidFill>
-                <a:latin typeface="Georgia" pitchFamily="34" charset="0"/>
-                <a:ea typeface="Georgia" pitchFamily="34" charset="-122"/>
-                <a:cs typeface="Georgia" pitchFamily="34" charset="-120"/>
-              </a:rPr>
-              <a:t>The dot method with carries</a:t>
-            </a:r>
-            <a:endParaRPr lang="en-US" sz="1300" dirty="0"/>
+                <a:spcPts val="1375"/>
+              </a:lnSpc>
+              <a:buNone/>
+            </a:pPr>
+            <a:r>
+              <a:rPr lang="en-US" sz="1100" dirty="0">
+                <a:solidFill>
+                  <a:srgbClr val="1C2833"/>
+                </a:solidFill>
+                <a:latin typeface="Courier New" pitchFamily="34" charset="0"/>
+                <a:ea typeface="Courier New" pitchFamily="34" charset="-122"/>
+                <a:cs typeface="Courier New" pitchFamily="34" charset="-120"/>
+              </a:rPr>
+              <a:t>· ·</a:t>
+            </a:r>
+            <a:endParaRPr lang="en-US" sz="1100" dirty="0"/>
           </a:p>
         </p:txBody>
       </p:sp>
@@ -5316,8 +6683,8 @@
         </p:nvSpPr>
         <p:spPr>
           <a:xfrm>
-            <a:off x="692051" y="1343174"/>
-            <a:ext cx="7973389" cy="230981"/>
+            <a:off x="631627" y="1185118"/>
+            <a:ext cx="8086939" cy="174575"/>
           </a:xfrm>
           <a:prstGeom prst="rect">
             <a:avLst/>
@@ -5331,87 +6698,119 @@
           <a:p>
             <a:pPr algn="l" indent="0" marL="0">
               <a:lnSpc>
-                <a:spcPts val="1820"/>
-              </a:lnSpc>
-              <a:spcBef>
-                <a:spcPts val="300"/>
-              </a:spcBef>
-              <a:spcAft>
-                <a:spcPts val="300"/>
-              </a:spcAft>
-              <a:buNone/>
-            </a:pPr>
-            <a:r>
-              <a:rPr lang="en-US" sz="1300" dirty="0">
-                <a:solidFill>
-                  <a:srgbClr val="1C2833"/>
-                </a:solidFill>
-                <a:latin typeface="Georgia" pitchFamily="34" charset="0"/>
-                <a:ea typeface="Georgia" pitchFamily="34" charset="-122"/>
-                <a:cs typeface="Georgia" pitchFamily="34" charset="-120"/>
-              </a:rPr>
-              <a:t>When you have multiple columns, the dots in column N become the </a:t>
-            </a:r>
+                <a:spcPts val="1375"/>
+              </a:lnSpc>
+              <a:buNone/>
+            </a:pPr>
+            <a:r>
+              <a:rPr lang="en-US" sz="1100" dirty="0">
+                <a:solidFill>
+                  <a:srgbClr val="1C2833"/>
+                </a:solidFill>
+                <a:latin typeface="Courier New" pitchFamily="34" charset="0"/>
+                <a:ea typeface="Courier New" pitchFamily="34" charset="-122"/>
+                <a:cs typeface="Courier New" pitchFamily="34" charset="-120"/>
+              </a:rPr>
+              <a:t>5728</a:t>
+            </a:r>
+            <a:endParaRPr lang="en-US" sz="1100" dirty="0"/>
+          </a:p>
+        </p:txBody>
+      </p:sp>
+      <p:sp>
+        <p:nvSpPr>
+          <p:cNvPr id="8" name="Text 6"/>
+          <p:cNvSpPr/>
+          <p:nvPr/>
+        </p:nvSpPr>
+        <p:spPr>
+          <a:xfrm>
+            <a:off x="631627" y="1359694"/>
+            <a:ext cx="8086939" cy="174575"/>
+          </a:xfrm>
+          <a:prstGeom prst="rect">
+            <a:avLst/>
+          </a:prstGeom>
+          <a:noFill/>
+          <a:ln/>
+        </p:spPr>
+        <p:txBody>
+          <a:bodyPr wrap="square" lIns="0" tIns="0" rIns="0" bIns="0" rtlCol="0" anchor="t"/>
+          <a:lstStyle/>
+          <a:p>
             <a:pPr algn="l" indent="0" marL="0">
               <a:lnSpc>
-                <a:spcPts val="1820"/>
-              </a:lnSpc>
-              <a:spcBef>
-                <a:spcPts val="300"/>
-              </a:spcBef>
-              <a:spcAft>
-                <a:spcPts val="300"/>
-              </a:spcAft>
-              <a:buNone/>
-            </a:pPr>
-            <a:r>
-              <a:rPr lang="en-US" sz="1300" i="1" dirty="0">
-                <a:solidFill>
-                  <a:srgbClr val="1C2833"/>
-                </a:solidFill>
-                <a:latin typeface="Georgia" pitchFamily="34" charset="0"/>
-                <a:ea typeface="Georgia" pitchFamily="34" charset="-122"/>
-                <a:cs typeface="Georgia" pitchFamily="34" charset="-120"/>
-              </a:rPr>
-              <a:t>carry</a:t>
-            </a:r>
+                <a:spcPts val="1375"/>
+              </a:lnSpc>
+              <a:buNone/>
+            </a:pPr>
+            <a:r>
+              <a:rPr lang="en-US" sz="1100" dirty="0">
+                <a:solidFill>
+                  <a:srgbClr val="1C2833"/>
+                </a:solidFill>
+                <a:latin typeface="Courier New" pitchFamily="34" charset="0"/>
+                <a:ea typeface="Courier New" pitchFamily="34" charset="-122"/>
+                <a:cs typeface="Courier New" pitchFamily="34" charset="-120"/>
+              </a:rPr>
+              <a:t>3417</a:t>
+            </a:r>
+            <a:endParaRPr lang="en-US" sz="1100" dirty="0"/>
+          </a:p>
+        </p:txBody>
+      </p:sp>
+      <p:sp>
+        <p:nvSpPr>
+          <p:cNvPr id="9" name="Text 7"/>
+          <p:cNvSpPr/>
+          <p:nvPr/>
+        </p:nvSpPr>
+        <p:spPr>
+          <a:xfrm>
+            <a:off x="631627" y="1534269"/>
+            <a:ext cx="8086939" cy="174575"/>
+          </a:xfrm>
+          <a:prstGeom prst="rect">
+            <a:avLst/>
+          </a:prstGeom>
+          <a:noFill/>
+          <a:ln/>
+        </p:spPr>
+        <p:txBody>
+          <a:bodyPr wrap="square" lIns="0" tIns="0" rIns="0" bIns="0" rtlCol="0" anchor="t"/>
+          <a:lstStyle/>
+          <a:p>
             <a:pPr algn="l" indent="0" marL="0">
               <a:lnSpc>
-                <a:spcPts val="1820"/>
-              </a:lnSpc>
-              <a:spcBef>
-                <a:spcPts val="300"/>
-              </a:spcBef>
-              <a:spcAft>
-                <a:spcPts val="300"/>
-              </a:spcAft>
-              <a:buNone/>
-            </a:pPr>
-            <a:r>
-              <a:rPr lang="en-US" sz="1300" dirty="0">
-                <a:solidFill>
-                  <a:srgbClr val="1C2833"/>
-                </a:solidFill>
-                <a:latin typeface="Georgia" pitchFamily="34" charset="0"/>
-                <a:ea typeface="Georgia" pitchFamily="34" charset="-122"/>
-                <a:cs typeface="Georgia" pitchFamily="34" charset="-120"/>
-              </a:rPr>
-              <a:t> added to column N+1.</a:t>
-            </a:r>
-            <a:endParaRPr lang="en-US" sz="1300" dirty="0"/>
-          </a:p>
-        </p:txBody>
-      </p:sp>
-      <p:sp>
-        <p:nvSpPr>
-          <p:cNvPr id="8" name="Text 6"/>
-          <p:cNvSpPr/>
-          <p:nvPr/>
-        </p:nvSpPr>
-        <p:spPr>
-          <a:xfrm>
-            <a:off x="692051" y="1612255"/>
-            <a:ext cx="7973389" cy="461963"/>
+                <a:spcPts val="1375"/>
+              </a:lnSpc>
+              <a:buNone/>
+            </a:pPr>
+            <a:r>
+              <a:rPr lang="en-US" sz="1100" dirty="0">
+                <a:solidFill>
+                  <a:srgbClr val="1C2833"/>
+                </a:solidFill>
+                <a:latin typeface="Courier New" pitchFamily="34" charset="0"/>
+                <a:ea typeface="Courier New" pitchFamily="34" charset="-122"/>
+                <a:cs typeface="Courier New" pitchFamily="34" charset="-120"/>
+              </a:rPr>
+              <a:t>6892</a:t>
+            </a:r>
+            <a:endParaRPr lang="en-US" sz="1100" dirty="0"/>
+          </a:p>
+        </p:txBody>
+      </p:sp>
+      <p:sp>
+        <p:nvSpPr>
+          <p:cNvPr id="10" name="Text 8"/>
+          <p:cNvSpPr/>
+          <p:nvPr/>
+        </p:nvSpPr>
+        <p:spPr>
+          <a:xfrm>
+            <a:off x="631627" y="1708845"/>
+            <a:ext cx="8086939" cy="174575"/>
           </a:xfrm>
           <a:prstGeom prst="rect">
             <a:avLst/>
@@ -5425,41 +6824,35 @@
           <a:p>
             <a:pPr algn="l" indent="0" marL="0">
               <a:lnSpc>
-                <a:spcPts val="1820"/>
-              </a:lnSpc>
-              <a:spcBef>
-                <a:spcPts val="300"/>
-              </a:spcBef>
-              <a:spcAft>
-                <a:spcPts val="300"/>
-              </a:spcAft>
-              <a:buNone/>
-            </a:pPr>
-            <a:r>
-              <a:rPr lang="en-US" sz="1300" i="1" dirty="0">
-                <a:solidFill>
-                  <a:srgbClr val="1C2833"/>
-                </a:solidFill>
-                <a:latin typeface="Georgia" pitchFamily="34" charset="0"/>
-                <a:ea typeface="Georgia" pitchFamily="34" charset="-122"/>
-                <a:cs typeface="Georgia" pitchFamily="34" charset="-120"/>
-              </a:rPr>
-              <a:t>Add the carry IN the column as you scan — either by including it as a tiny digit at the top of the column, or by adding it to your starting running total.</a:t>
-            </a:r>
-            <a:endParaRPr lang="en-US" sz="1300" dirty="0"/>
-          </a:p>
-        </p:txBody>
-      </p:sp>
-      <p:sp>
-        <p:nvSpPr>
-          <p:cNvPr id="9" name="Text 7"/>
-          <p:cNvSpPr/>
-          <p:nvPr/>
-        </p:nvSpPr>
-        <p:spPr>
-          <a:xfrm>
-            <a:off x="692051" y="2112318"/>
-            <a:ext cx="7973389" cy="230981"/>
+                <a:spcPts val="1375"/>
+              </a:lnSpc>
+              <a:buNone/>
+            </a:pPr>
+            <a:r>
+              <a:rPr lang="en-US" sz="1100" dirty="0">
+                <a:solidFill>
+                  <a:srgbClr val="1C2833"/>
+                </a:solidFill>
+                <a:latin typeface="Courier New" pitchFamily="34" charset="0"/>
+                <a:ea typeface="Courier New" pitchFamily="34" charset="-122"/>
+                <a:cs typeface="Courier New" pitchFamily="34" charset="-120"/>
+              </a:rPr>
+              <a:t>4536+</a:t>
+            </a:r>
+            <a:endParaRPr lang="en-US" sz="1100" dirty="0"/>
+          </a:p>
+        </p:txBody>
+      </p:sp>
+      <p:sp>
+        <p:nvSpPr>
+          <p:cNvPr id="11" name="Text 9"/>
+          <p:cNvSpPr/>
+          <p:nvPr/>
+        </p:nvSpPr>
+        <p:spPr>
+          <a:xfrm>
+            <a:off x="631627" y="1883420"/>
+            <a:ext cx="8086939" cy="174575"/>
           </a:xfrm>
           <a:prstGeom prst="rect">
             <a:avLst/>
@@ -5473,57 +6866,28 @@
           <a:p>
             <a:pPr algn="l" indent="0" marL="0">
               <a:lnSpc>
-                <a:spcPts val="1820"/>
-              </a:lnSpc>
-              <a:spcBef>
-                <a:spcPts val="300"/>
-              </a:spcBef>
-              <a:spcAft>
-                <a:spcPts val="300"/>
-              </a:spcAft>
-              <a:buNone/>
-            </a:pPr>
-            <a:r>
-              <a:rPr lang="en-US" sz="1300" b="1" i="1" dirty="0">
-                <a:solidFill>
-                  <a:srgbClr val="1C2833"/>
-                </a:solidFill>
-                <a:latin typeface="Georgia" pitchFamily="34" charset="0"/>
-                <a:ea typeface="Georgia" pitchFamily="34" charset="-122"/>
-                <a:cs typeface="Georgia" pitchFamily="34" charset="-120"/>
-              </a:rPr>
-              <a:t>Practice this until</a:t>
-            </a:r>
-            <a:pPr algn="l" indent="0" marL="0">
-              <a:lnSpc>
-                <a:spcPts val="1820"/>
-              </a:lnSpc>
-              <a:spcBef>
-                <a:spcPts val="300"/>
-              </a:spcBef>
-              <a:spcAft>
-                <a:spcPts val="300"/>
-              </a:spcAft>
-              <a:buNone/>
-            </a:pPr>
-            <a:r>
-              <a:rPr lang="en-US" sz="1300" dirty="0">
-                <a:solidFill>
-                  <a:srgbClr val="1C2833"/>
-                </a:solidFill>
-                <a:latin typeface="Georgia" pitchFamily="34" charset="0"/>
-                <a:ea typeface="Georgia" pitchFamily="34" charset="-122"/>
-                <a:cs typeface="Georgia" pitchFamily="34" charset="-120"/>
-              </a:rPr>
-              <a:t> you can do a 4×4-digit sum in under 60 seconds.</a:t>
-            </a:r>
-            <a:endParaRPr lang="en-US" sz="1300" dirty="0"/>
-          </a:p>
-        </p:txBody>
-      </p:sp>
-      <p:sp>
-        <p:nvSpPr>
-          <p:cNvPr id="10" name="Text 8"/>
+                <a:spcPts val="1375"/>
+              </a:lnSpc>
+              <a:buNone/>
+            </a:pPr>
+            <a:r>
+              <a:rPr lang="en-US" sz="1100" dirty="0">
+                <a:solidFill>
+                  <a:srgbClr val="1C2833"/>
+                </a:solidFill>
+                <a:latin typeface="Courier New" pitchFamily="34" charset="0"/>
+                <a:ea typeface="Courier New" pitchFamily="34" charset="-122"/>
+                <a:cs typeface="Courier New" pitchFamily="34" charset="-120"/>
+              </a:rPr>
+              <a:t>3 [carry 2]</a:t>
+            </a:r>
+            <a:endParaRPr lang="en-US" sz="1100" dirty="0"/>
+          </a:p>
+        </p:txBody>
+      </p:sp>
+      <p:sp>
+        <p:nvSpPr>
+          <p:cNvPr id="12" name="Text 10"/>
           <p:cNvSpPr/>
           <p:nvPr/>
         </p:nvSpPr>
@@ -5673,7 +7037,7 @@
                 <a:ea typeface="Georgia" pitchFamily="34" charset="-122"/>
                 <a:cs typeface="Georgia" pitchFamily="34" charset="-120"/>
               </a:rPr>
-              <a:t>Homework</a:t>
+              <a:t>Core (10 min) — The carry handoff (cont.)</a:t>
             </a:r>
             <a:endParaRPr lang="en-US" sz="1800" dirty="0"/>
           </a:p>
@@ -5688,7 +7052,7 @@
         <p:spPr>
           <a:xfrm>
             <a:off x="406301" y="870942"/>
-            <a:ext cx="8498026" cy="426541"/>
+            <a:ext cx="8498026" cy="213271"/>
           </a:xfrm>
           <a:prstGeom prst="rect">
             <a:avLst/>
@@ -5713,7 +7077,7 @@
               <a:buNone/>
             </a:pPr>
             <a:r>
-              <a:rPr lang="en-US" sz="1200" dirty="0">
+              <a:rPr lang="en-US" sz="1200" b="1" dirty="0">
                 <a:solidFill>
                   <a:srgbClr val="1C2833"/>
                 </a:solidFill>
@@ -5721,7 +7085,30 @@
                 <a:ea typeface="Arial" pitchFamily="34" charset="-122"/>
                 <a:cs typeface="Arial" pitchFamily="34" charset="-120"/>
               </a:rPr>
-              <a:t>– Find a column-addition problem in any textbook. Solve it BOTH ways (standard + dot method). Time yourself for each. Bring tomorrow.</a:t>
+              <a:t>Tens column:</a:t>
+            </a:r>
+            <a:pPr algn="l" indent="0" marL="0">
+              <a:lnSpc>
+                <a:spcPts val="1680"/>
+              </a:lnSpc>
+              <a:spcBef>
+                <a:spcPts val="300"/>
+              </a:spcBef>
+              <a:spcAft>
+                <a:spcPts val="300"/>
+              </a:spcAft>
+              <a:buNone/>
+            </a:pPr>
+            <a:r>
+              <a:rPr lang="en-US" sz="1200" dirty="0">
+                <a:solidFill>
+                  <a:srgbClr val="1C2833"/>
+                </a:solidFill>
+                <a:latin typeface="Arial" pitchFamily="34" charset="0"/>
+                <a:ea typeface="Arial" pitchFamily="34" charset="-122"/>
+                <a:cs typeface="Arial" pitchFamily="34" charset="-120"/>
+              </a:rPr>
+              <a:t> 2 + 1 + 9 + 3 + carry-2.</a:t>
             </a:r>
             <a:endParaRPr lang="en-US" sz="1200" dirty="0"/>
           </a:p>
@@ -5730,6 +7117,148 @@
       <p:sp>
         <p:nvSpPr>
           <p:cNvPr id="5" name="Text 3"/>
+          <p:cNvSpPr/>
+          <p:nvPr/>
+        </p:nvSpPr>
+        <p:spPr>
+          <a:xfrm>
+            <a:off x="634901" y="1173063"/>
+            <a:ext cx="8102798" cy="769441"/>
+          </a:xfrm>
+          <a:prstGeom prst="rect">
+            <a:avLst/>
+          </a:prstGeom>
+          <a:noFill/>
+          <a:ln/>
+        </p:spPr>
+        <p:txBody>
+          <a:bodyPr wrap="square" lIns="0" tIns="0" rIns="0" bIns="0" rtlCol="0" anchor="t"/>
+          <a:lstStyle/>
+          <a:p>
+            <a:pPr algn="l" marL="342900" indent="-342900">
+              <a:lnSpc>
+                <a:spcPts val="1620"/>
+              </a:lnSpc>
+              <a:spcAft>
+                <a:spcPts val="300"/>
+              </a:spcAft>
+              <a:buSzPct val="100000"/>
+              <a:buChar char="•"/>
+            </a:pPr>
+            <a:r>
+              <a:rPr lang="en-US" sz="1200" dirty="0">
+                <a:solidFill>
+                  <a:srgbClr val="1C2833"/>
+                </a:solidFill>
+                <a:latin typeface="Arial" pitchFamily="34" charset="0"/>
+                <a:ea typeface="Arial" pitchFamily="34" charset="-122"/>
+                <a:cs typeface="Arial" pitchFamily="34" charset="-120"/>
+              </a:rPr>
+              <a:t>Include the carry IN the column (write it as a small digit at the top of the column, or hold it in your head).</a:t>
+            </a:r>
+            <a:endParaRPr lang="en-US" sz="1200" dirty="0"/>
+          </a:p>
+          <a:p>
+            <a:pPr algn="l" marL="342900" indent="-342900">
+              <a:lnSpc>
+                <a:spcPts val="1620"/>
+              </a:lnSpc>
+              <a:spcAft>
+                <a:spcPts val="300"/>
+              </a:spcAft>
+              <a:buSzPct val="100000"/>
+              <a:buChar char="•"/>
+            </a:pPr>
+            <a:r>
+              <a:rPr lang="en-US" sz="1200" dirty="0">
+                <a:solidFill>
+                  <a:srgbClr val="1C2833"/>
+                </a:solidFill>
+                <a:latin typeface="Arial" pitchFamily="34" charset="0"/>
+                <a:ea typeface="Arial" pitchFamily="34" charset="-122"/>
+                <a:cs typeface="Arial" pitchFamily="34" charset="-120"/>
+              </a:rPr>
+              <a:t>0 → 2 → 3 → 12 (dot on 9, total 2) → 5 → 7 (the carry).</a:t>
+            </a:r>
+            <a:endParaRPr lang="en-US" sz="1200" dirty="0"/>
+          </a:p>
+          <a:p>
+            <a:pPr algn="l" marL="342900" indent="-342900">
+              <a:lnSpc>
+                <a:spcPts val="1620"/>
+              </a:lnSpc>
+              <a:spcAft>
+                <a:spcPts val="300"/>
+              </a:spcAft>
+              <a:buSzPct val="100000"/>
+              <a:buChar char="•"/>
+            </a:pPr>
+            <a:r>
+              <a:rPr lang="en-US" sz="1200" b="1" dirty="0">
+                <a:solidFill>
+                  <a:srgbClr val="1C2833"/>
+                </a:solidFill>
+                <a:latin typeface="Arial" pitchFamily="34" charset="0"/>
+                <a:ea typeface="Arial" pitchFamily="34" charset="-122"/>
+                <a:cs typeface="Arial" pitchFamily="34" charset="-120"/>
+              </a:rPr>
+              <a:t>Write 7. Carry 1.</a:t>
+            </a:r>
+            <a:endParaRPr lang="en-US" sz="1200" dirty="0"/>
+          </a:p>
+        </p:txBody>
+      </p:sp>
+      <p:sp>
+        <p:nvSpPr>
+          <p:cNvPr id="6" name="Text 4"/>
+          <p:cNvSpPr/>
+          <p:nvPr/>
+        </p:nvSpPr>
+        <p:spPr>
+          <a:xfrm>
+            <a:off x="406301" y="2031355"/>
+            <a:ext cx="8498026" cy="213271"/>
+          </a:xfrm>
+          <a:prstGeom prst="rect">
+            <a:avLst/>
+          </a:prstGeom>
+          <a:noFill/>
+          <a:ln/>
+        </p:spPr>
+        <p:txBody>
+          <a:bodyPr wrap="square" lIns="0" tIns="0" rIns="0" bIns="0" rtlCol="0" anchor="t"/>
+          <a:lstStyle/>
+          <a:p>
+            <a:pPr algn="l" indent="0" marL="0">
+              <a:lnSpc>
+                <a:spcPts val="1680"/>
+              </a:lnSpc>
+              <a:spcBef>
+                <a:spcPts val="300"/>
+              </a:spcBef>
+              <a:spcAft>
+                <a:spcPts val="300"/>
+              </a:spcAft>
+              <a:buNone/>
+            </a:pPr>
+            <a:r>
+              <a:rPr lang="en-US" sz="1200" dirty="0">
+                <a:solidFill>
+                  <a:srgbClr val="1C2833"/>
+                </a:solidFill>
+                <a:latin typeface="Arial" pitchFamily="34" charset="0"/>
+                <a:ea typeface="Arial" pitchFamily="34" charset="-122"/>
+                <a:cs typeface="Arial" pitchFamily="34" charset="-120"/>
+              </a:rPr>
+              <a:t>Continue.</a:t>
+            </a:r>
+            <a:endParaRPr lang="en-US" sz="1200" dirty="0"/>
+          </a:p>
+        </p:txBody>
+      </p:sp>
+      <p:sp>
+        <p:nvSpPr>
+          <p:cNvPr id="7" name="Text 5"/>
           <p:cNvSpPr/>
           <p:nvPr/>
         </p:nvSpPr>
